--- a/slides/docker-session6-fullstack-todo.pptx
+++ b/slides/docker-session6-fullstack-todo.pptx
@@ -17,6 +17,7 @@
     <p:sldId xmlns:r="http://schemas.openxmlformats.org/officeDocument/2006/relationships" id="262" r:id="R505afd6e76824828"/>
     <p:sldId xmlns:r="http://schemas.openxmlformats.org/officeDocument/2006/relationships" id="263" r:id="R62a01bea38a748e6"/>
     <p:sldId xmlns:r="http://schemas.openxmlformats.org/officeDocument/2006/relationships" id="264" r:id="Rd1c1787bf3854863"/>
+    <p:sldId xmlns:r="http://schemas.openxmlformats.org/officeDocument/2006/relationships" id="272" r:id="rIdCodexComposeTag17"/>
     <p:sldId xmlns:r="http://schemas.openxmlformats.org/officeDocument/2006/relationships" id="265" r:id="R5781590e9e464878"/>
     <p:sldId xmlns:r="http://schemas.openxmlformats.org/officeDocument/2006/relationships" id="266" r:id="R3b172b3833934dae"/>
     <p:sldId xmlns:r="http://schemas.openxmlformats.org/officeDocument/2006/relationships" id="267" r:id="Ra67c9973821e479c"/>
@@ -8355,6 +8356,803 @@
 </p:sld>
 </file>
 
+<file path=ppt/slides/slide17.xml><?xml version="1.0" encoding="utf-8"?>
+<p:sld xmlns:a="http://schemas.openxmlformats.org/drawingml/2006/main" xmlns:p="http://schemas.openxmlformats.org/presentationml/2006/main" xmlns:r="http://schemas.openxmlformats.org/officeDocument/2006/relationships">
+  <p:cSld name="Compose 版本標籤">
+    <p:bg>
+      <p:bgPr>
+        <a:solidFill>
+          <a:srgbClr val="F6F8FB"/>
+        </a:solidFill>
+      </p:bgPr>
+    </p:bg>
+    <p:spTree>
+      <p:nvGrpSpPr>
+        <p:cNvPr id="1" name=""/>
+        <p:cNvGrpSpPr/>
+        <p:nvPr/>
+      </p:nvGrpSpPr>
+      <p:grpSpPr>
+        <a:xfrm/>
+      </p:grpSpPr>
+      <p:sp>
+        <p:nvSpPr>
+          <p:cNvPr id="2" name=""/>
+          <p:cNvSpPr>
+            <a:spLocks noGrp="1"/>
+          </p:cNvSpPr>
+          <p:nvPr/>
+        </p:nvSpPr>
+        <p:spPr>
+          <a:xfrm>
+            <a:off x="685800" y="400050"/>
+            <a:ext cx="6191250" cy="228600"/>
+          </a:xfrm>
+          <a:prstGeom prst="rect">
+            <a:avLst/>
+          </a:prstGeom>
+          <a:noFill/>
+          <a:ln w="0">
+            <a:noFill/>
+            <a:prstDash val="solid"/>
+          </a:ln>
+        </p:spPr>
+        <p:txBody>
+          <a:bodyPr lIns="0" tIns="0" rIns="0" bIns="0" anchor="t">
+            <a:normAutofit fontScale="100000"/>
+          </a:bodyPr>
+          <a:lstStyle/>
+          <a:p>
+            <a:pPr algn="l">
+              <a:lnSpc>
+                <a:spcPct val="106000"/>
+              </a:lnSpc>
+              <a:buNone/>
+              <a:defRPr sz="900" b="1">
+                <a:solidFill>
+                  <a:srgbClr val="0B5CAD"/>
+                </a:solidFill>
+                <a:latin typeface="Aptos"/>
+                <a:ea typeface="Aptos"/>
+                <a:cs typeface="Aptos"/>
+              </a:defRPr>
+            </a:pPr>
+            <a:r>
+              <a:rPr sz="900" b="1">
+                <a:solidFill>
+                  <a:srgbClr val="0B5CAD"/>
+                </a:solidFill>
+                <a:latin typeface="Aptos"/>
+                <a:ea typeface="Aptos"/>
+                <a:cs typeface="Aptos"/>
+              </a:rPr>
+              <a:t>COMPOSE TAGGING</a:t>
+            </a:r>
+          </a:p>
+        </p:txBody>
+      </p:sp>
+      <p:sp>
+        <p:nvSpPr>
+          <p:cNvPr id="3" name=""/>
+          <p:cNvSpPr>
+            <a:spLocks noGrp="1"/>
+          </p:cNvSpPr>
+          <p:nvPr/>
+        </p:nvSpPr>
+        <p:spPr>
+          <a:xfrm>
+            <a:off x="685800" y="742950"/>
+            <a:ext cx="9906000" cy="571500"/>
+          </a:xfrm>
+          <a:prstGeom prst="rect">
+            <a:avLst/>
+          </a:prstGeom>
+          <a:noFill/>
+          <a:ln w="0">
+            <a:noFill/>
+            <a:prstDash val="solid"/>
+          </a:ln>
+        </p:spPr>
+        <p:txBody>
+          <a:bodyPr lIns="0" tIns="0" rIns="0" bIns="0" anchor="t">
+            <a:normAutofit fontScale="100000"/>
+          </a:bodyPr>
+          <a:lstStyle/>
+          <a:p>
+            <a:pPr algn="l">
+              <a:lnSpc>
+                <a:spcPct val="106000"/>
+              </a:lnSpc>
+              <a:buNone/>
+              <a:defRPr sz="2750" b="1">
+                <a:solidFill>
+                  <a:srgbClr val="0B1220"/>
+                </a:solidFill>
+                <a:latin typeface="Aptos Display"/>
+                <a:ea typeface="Aptos Display"/>
+                <a:cs typeface="Aptos Display"/>
+              </a:defRPr>
+            </a:pPr>
+            <a:r>
+              <a:rPr sz="2750" b="1">
+                <a:solidFill>
+                  <a:srgbClr val="0B1220"/>
+                </a:solidFill>
+                <a:latin typeface="Aptos Display"/>
+                <a:ea typeface="Aptos Display"/>
+                <a:cs typeface="Aptos Display"/>
+              </a:rPr>
+              <a:t>Compose 裡版本號該寫在哪裡？</a:t>
+            </a:r>
+          </a:p>
+        </p:txBody>
+      </p:sp>
+      <p:sp>
+        <p:nvSpPr>
+          <p:cNvPr id="4" name=""/>
+          <p:cNvSpPr>
+            <a:spLocks noGrp="1"/>
+          </p:cNvSpPr>
+          <p:nvPr/>
+        </p:nvSpPr>
+        <p:spPr>
+          <a:xfrm>
+            <a:off x="685800" y="1457325"/>
+            <a:ext cx="3238500" cy="2476500"/>
+          </a:xfrm>
+          <a:prstGeom prst="roundRect">
+            <a:avLst>
+              <a:gd name="adj" fmla="val 8000"/>
+            </a:avLst>
+          </a:prstGeom>
+          <a:solidFill>
+            <a:srgbClr val="E8F3FF"/>
+          </a:solidFill>
+          <a:ln w="9525">
+            <a:solidFill>
+              <a:srgbClr val="B7DCFF"/>
+            </a:solidFill>
+            <a:prstDash val="solid"/>
+          </a:ln>
+        </p:spPr>
+        <p:txBody>
+          <a:bodyPr lIns="209550" tIns="209550" rIns="209550" bIns="209550" anchor="t">
+            <a:normAutofit fontScale="100000"/>
+          </a:bodyPr>
+          <a:lstStyle/>
+          <a:p>
+            <a:pPr algn="ctr">
+              <a:lnSpc>
+                <a:spcPct val="106000"/>
+              </a:lnSpc>
+              <a:buNone/>
+              <a:defRPr sz="1700" b="1">
+                <a:solidFill>
+                  <a:srgbClr val="0B5CAD"/>
+                </a:solidFill>
+                <a:latin typeface="Aptos Display"/>
+                <a:ea typeface="Aptos Display"/>
+                <a:cs typeface="Aptos Display"/>
+              </a:defRPr>
+            </a:pPr>
+            <a:r>
+              <a:rPr sz="1700" b="1">
+                <a:solidFill>
+                  <a:srgbClr val="0B5CAD"/>
+                </a:solidFill>
+                <a:latin typeface="Aptos Display"/>
+                <a:ea typeface="Aptos Display"/>
+                <a:cs typeface="Aptos Display"/>
+              </a:rPr>
+              <a:t>Compose 檔案</a:t>
+            </a:r>
+          </a:p>
+          <a:p>
+            <a:pPr>
+              <a:buNone/>
+              <a:defRPr sz="500"/>
+            </a:pPr>
+          </a:p>
+          <a:p>
+            <a:pPr algn="ctr">
+              <a:lnSpc>
+                <a:spcPct val="106000"/>
+              </a:lnSpc>
+              <a:buNone/>
+              <a:defRPr sz="1225" b="1">
+                <a:solidFill>
+                  <a:srgbClr val="0B1220"/>
+                </a:solidFill>
+                <a:latin typeface="Aptos"/>
+                <a:ea typeface="Aptos"/>
+                <a:cs typeface="Aptos"/>
+              </a:defRPr>
+            </a:pPr>
+            <a:r>
+              <a:rPr sz="1225" b="1">
+                <a:solidFill>
+                  <a:srgbClr val="0B1220"/>
+                </a:solidFill>
+                <a:latin typeface="Aptos"/>
+                <a:ea typeface="Aptos"/>
+                <a:cs typeface="Aptos"/>
+              </a:rPr>
+              <a:t>不要再寫舊式頂層 version: "3.8"</a:t>
+            </a:r>
+          </a:p>
+          <a:p>
+            <a:pPr algn="ctr">
+              <a:lnSpc>
+                <a:spcPct val="106000"/>
+              </a:lnSpc>
+              <a:buNone/>
+              <a:defRPr sz="1125" b="0">
+                <a:solidFill>
+                  <a:srgbClr val="334155"/>
+                </a:solidFill>
+                <a:latin typeface="Aptos"/>
+                <a:ea typeface="Aptos"/>
+                <a:cs typeface="Aptos"/>
+              </a:defRPr>
+            </a:pPr>
+            <a:r>
+              <a:rPr sz="1125" b="0">
+                <a:solidFill>
+                  <a:srgbClr val="334155"/>
+                </a:solidFill>
+                <a:latin typeface="Aptos"/>
+                <a:ea typeface="Aptos"/>
+                <a:cs typeface="Aptos"/>
+              </a:rPr>
+              <a:t>Docker Compose V2 會用 Compose Specification。</a:t>
+            </a:r>
+          </a:p>
+        </p:txBody>
+      </p:sp>
+      <p:sp>
+        <p:nvSpPr>
+          <p:cNvPr id="5" name=""/>
+          <p:cNvSpPr>
+            <a:spLocks noGrp="1"/>
+          </p:cNvSpPr>
+          <p:nvPr/>
+        </p:nvSpPr>
+        <p:spPr>
+          <a:xfrm>
+            <a:off x="4457700" y="1457325"/>
+            <a:ext cx="3238500" cy="2476500"/>
+          </a:xfrm>
+          <a:prstGeom prst="roundRect">
+            <a:avLst>
+              <a:gd name="adj" fmla="val 8000"/>
+            </a:avLst>
+          </a:prstGeom>
+          <a:solidFill>
+            <a:srgbClr val="EAF7EF"/>
+          </a:solidFill>
+          <a:ln w="9525">
+            <a:solidFill>
+              <a:srgbClr val="B7E4C7"/>
+            </a:solidFill>
+            <a:prstDash val="solid"/>
+          </a:ln>
+        </p:spPr>
+        <p:txBody>
+          <a:bodyPr lIns="209550" tIns="209550" rIns="209550" bIns="209550" anchor="t">
+            <a:normAutofit fontScale="100000"/>
+          </a:bodyPr>
+          <a:lstStyle/>
+          <a:p>
+            <a:pPr algn="ctr">
+              <a:lnSpc>
+                <a:spcPct val="106000"/>
+              </a:lnSpc>
+              <a:buNone/>
+              <a:defRPr sz="1700" b="1">
+                <a:solidFill>
+                  <a:srgbClr val="087F5B"/>
+                </a:solidFill>
+                <a:latin typeface="Aptos Display"/>
+                <a:ea typeface="Aptos Display"/>
+                <a:cs typeface="Aptos Display"/>
+              </a:defRPr>
+            </a:pPr>
+            <a:r>
+              <a:rPr sz="1700" b="1">
+                <a:solidFill>
+                  <a:srgbClr val="087F5B"/>
+                </a:solidFill>
+                <a:latin typeface="Aptos Display"/>
+                <a:ea typeface="Aptos Display"/>
+                <a:cs typeface="Aptos Display"/>
+              </a:rPr>
+              <a:t>Service image</a:t>
+            </a:r>
+          </a:p>
+          <a:p>
+            <a:pPr>
+              <a:buNone/>
+              <a:defRPr sz="500"/>
+            </a:pPr>
+          </a:p>
+          <a:p>
+            <a:pPr algn="ctr">
+              <a:lnSpc>
+                <a:spcPct val="106000"/>
+              </a:lnSpc>
+              <a:buNone/>
+              <a:defRPr sz="1225" b="1">
+                <a:solidFill>
+                  <a:srgbClr val="0B1220"/>
+                </a:solidFill>
+                <a:latin typeface="Aptos"/>
+                <a:ea typeface="Aptos"/>
+                <a:cs typeface="Aptos"/>
+              </a:defRPr>
+            </a:pPr>
+            <a:r>
+              <a:rPr sz="1225" b="1">
+                <a:solidFill>
+                  <a:srgbClr val="0B1220"/>
+                </a:solidFill>
+                <a:latin typeface="Aptos"/>
+                <a:ea typeface="Aptos"/>
+                <a:cs typeface="Aptos"/>
+              </a:rPr>
+              <a:t>要寫明確 tag</a:t>
+            </a:r>
+          </a:p>
+          <a:p>
+            <a:pPr algn="ctr">
+              <a:lnSpc>
+                <a:spcPct val="106000"/>
+              </a:lnSpc>
+              <a:buNone/>
+              <a:defRPr sz="1125" b="0">
+                <a:solidFill>
+                  <a:srgbClr val="334155"/>
+                </a:solidFill>
+                <a:latin typeface="Aptos Mono"/>
+                <a:ea typeface="Aptos Mono"/>
+                <a:cs typeface="Aptos Mono"/>
+              </a:defRPr>
+            </a:pPr>
+            <a:r>
+              <a:rPr sz="1125" b="0">
+                <a:solidFill>
+                  <a:srgbClr val="334155"/>
+                </a:solidFill>
+                <a:latin typeface="Aptos Mono"/>
+                <a:ea typeface="Aptos Mono"/>
+                <a:cs typeface="Aptos Mono"/>
+              </a:rPr>
+              <a:t>mysql:8.0</a:t>
+            </a:r>
+          </a:p>
+          <a:p>
+            <a:pPr algn="ctr">
+              <a:lnSpc>
+                <a:spcPct val="106000"/>
+              </a:lnSpc>
+              <a:buNone/>
+              <a:defRPr sz="1125" b="0">
+                <a:solidFill>
+                  <a:srgbClr val="334155"/>
+                </a:solidFill>
+                <a:latin typeface="Aptos Mono"/>
+                <a:ea typeface="Aptos Mono"/>
+                <a:cs typeface="Aptos Mono"/>
+              </a:defRPr>
+            </a:pPr>
+            <a:r>
+              <a:rPr sz="1125" b="0">
+                <a:solidFill>
+                  <a:srgbClr val="334155"/>
+                </a:solidFill>
+                <a:latin typeface="Aptos Mono"/>
+                <a:ea typeface="Aptos Mono"/>
+                <a:cs typeface="Aptos Mono"/>
+              </a:rPr>
+              <a:t>todo-backend:1.0.0</a:t>
+            </a:r>
+          </a:p>
+        </p:txBody>
+      </p:sp>
+      <p:sp>
+        <p:nvSpPr>
+          <p:cNvPr id="6" name=""/>
+          <p:cNvSpPr>
+            <a:spLocks noGrp="1"/>
+          </p:cNvSpPr>
+          <p:nvPr/>
+        </p:nvSpPr>
+        <p:spPr>
+          <a:xfrm>
+            <a:off x="8229600" y="1457325"/>
+            <a:ext cx="3238500" cy="2476500"/>
+          </a:xfrm>
+          <a:prstGeom prst="roundRect">
+            <a:avLst>
+              <a:gd name="adj" fmla="val 8000"/>
+            </a:avLst>
+          </a:prstGeom>
+          <a:solidFill>
+            <a:srgbClr val="FFF7E6"/>
+          </a:solidFill>
+          <a:ln w="9525">
+            <a:solidFill>
+              <a:srgbClr val="FFD999"/>
+            </a:solidFill>
+            <a:prstDash val="solid"/>
+          </a:ln>
+        </p:spPr>
+        <p:txBody>
+          <a:bodyPr lIns="209550" tIns="209550" rIns="209550" bIns="209550" anchor="t">
+            <a:normAutofit fontScale="100000"/>
+          </a:bodyPr>
+          <a:lstStyle/>
+          <a:p>
+            <a:pPr algn="ctr">
+              <a:lnSpc>
+                <a:spcPct val="106000"/>
+              </a:lnSpc>
+              <a:buNone/>
+              <a:defRPr sz="1700" b="1">
+                <a:solidFill>
+                  <a:srgbClr val="A16207"/>
+                </a:solidFill>
+                <a:latin typeface="Aptos Display"/>
+                <a:ea typeface="Aptos Display"/>
+                <a:cs typeface="Aptos Display"/>
+              </a:defRPr>
+            </a:pPr>
+            <a:r>
+              <a:rPr sz="1700" b="1">
+                <a:solidFill>
+                  <a:srgbClr val="A16207"/>
+                </a:solidFill>
+                <a:latin typeface="Aptos Display"/>
+                <a:ea typeface="Aptos Display"/>
+                <a:cs typeface="Aptos Display"/>
+              </a:rPr>
+              <a:t>Build 服務</a:t>
+            </a:r>
+          </a:p>
+          <a:p>
+            <a:pPr>
+              <a:buNone/>
+              <a:defRPr sz="500"/>
+            </a:pPr>
+          </a:p>
+          <a:p>
+            <a:pPr algn="ctr">
+              <a:lnSpc>
+                <a:spcPct val="106000"/>
+              </a:lnSpc>
+              <a:buNone/>
+              <a:defRPr sz="1225" b="1">
+                <a:solidFill>
+                  <a:srgbClr val="0B1220"/>
+                </a:solidFill>
+                <a:latin typeface="Aptos"/>
+                <a:ea typeface="Aptos"/>
+                <a:cs typeface="Aptos"/>
+              </a:defRPr>
+            </a:pPr>
+            <a:r>
+              <a:rPr sz="1225" b="1">
+                <a:solidFill>
+                  <a:srgbClr val="0B1220"/>
+                </a:solidFill>
+                <a:latin typeface="Aptos"/>
+                <a:ea typeface="Aptos"/>
+                <a:cs typeface="Aptos"/>
+              </a:rPr>
+              <a:t>image + build 可以同時寫</a:t>
+            </a:r>
+          </a:p>
+          <a:p>
+            <a:pPr algn="ctr">
+              <a:lnSpc>
+                <a:spcPct val="106000"/>
+              </a:lnSpc>
+              <a:buNone/>
+              <a:defRPr sz="1125" b="0">
+                <a:solidFill>
+                  <a:srgbClr val="334155"/>
+                </a:solidFill>
+                <a:latin typeface="Aptos"/>
+                <a:ea typeface="Aptos"/>
+                <a:cs typeface="Aptos"/>
+              </a:defRPr>
+            </a:pPr>
+            <a:r>
+              <a:rPr sz="1125" b="0">
+                <a:solidFill>
+                  <a:srgbClr val="334155"/>
+                </a:solidFill>
+                <a:latin typeface="Aptos"/>
+                <a:ea typeface="Aptos"/>
+                <a:cs typeface="Aptos"/>
+              </a:rPr>
+              <a:t>build 負責建立；image 負責命名與版本。</a:t>
+            </a:r>
+          </a:p>
+        </p:txBody>
+      </p:sp>
+      <p:sp>
+        <p:nvSpPr>
+          <p:cNvPr id="7" name=""/>
+          <p:cNvSpPr>
+            <a:spLocks noGrp="1"/>
+          </p:cNvSpPr>
+          <p:nvPr/>
+        </p:nvSpPr>
+        <p:spPr>
+          <a:xfrm>
+            <a:off x="1143000" y="4324350"/>
+            <a:ext cx="9144000" cy="628650"/>
+          </a:xfrm>
+          <a:prstGeom prst="roundRect">
+            <a:avLst>
+              <a:gd name="adj" fmla="val 8000"/>
+            </a:avLst>
+          </a:prstGeom>
+          <a:solidFill>
+            <a:srgbClr val="111827"/>
+          </a:solidFill>
+          <a:ln w="0">
+            <a:noFill/>
+            <a:prstDash val="solid"/>
+          </a:ln>
+        </p:spPr>
+        <p:txBody>
+          <a:bodyPr lIns="152400" tIns="152400" rIns="152400" bIns="152400" anchor="t">
+            <a:normAutofit fontScale="100000"/>
+          </a:bodyPr>
+          <a:lstStyle/>
+          <a:p>
+            <a:pPr algn="ctr">
+              <a:lnSpc>
+                <a:spcPct val="106000"/>
+              </a:lnSpc>
+              <a:buNone/>
+              <a:defRPr sz="1500" b="1">
+                <a:solidFill>
+                  <a:srgbClr val="FFFFFF"/>
+                </a:solidFill>
+                <a:latin typeface="Aptos"/>
+                <a:ea typeface="Aptos"/>
+                <a:cs typeface="Aptos"/>
+              </a:defRPr>
+            </a:pPr>
+            <a:r>
+              <a:rPr sz="1500" b="1">
+                <a:solidFill>
+                  <a:srgbClr val="FFFFFF"/>
+                </a:solidFill>
+                <a:latin typeface="Aptos"/>
+                <a:ea typeface="Aptos"/>
+                <a:cs typeface="Aptos"/>
+              </a:rPr>
+              <a:t>教學口訣：Compose 不寫舊 version；Image 不靠 latest。</a:t>
+            </a:r>
+          </a:p>
+        </p:txBody>
+      </p:sp>
+      <p:sp>
+        <p:nvSpPr>
+          <p:cNvPr id="8" name=""/>
+          <p:cNvSpPr>
+            <a:spLocks noGrp="1"/>
+          </p:cNvSpPr>
+          <p:nvPr/>
+        </p:nvSpPr>
+        <p:spPr>
+          <a:xfrm>
+            <a:off x="1714500" y="5156200"/>
+            <a:ext cx="8001000" cy="514350"/>
+          </a:xfrm>
+          <a:prstGeom prst="roundRect">
+            <a:avLst>
+              <a:gd name="adj" fmla="val 8000"/>
+            </a:avLst>
+          </a:prstGeom>
+          <a:solidFill>
+            <a:srgbClr val="EEF2F7"/>
+          </a:solidFill>
+          <a:ln w="9525">
+            <a:solidFill>
+              <a:srgbClr val="D9E2EC"/>
+            </a:solidFill>
+            <a:prstDash val="solid"/>
+          </a:ln>
+        </p:spPr>
+        <p:txBody>
+          <a:bodyPr lIns="152400" tIns="152400" rIns="152400" bIns="152400" anchor="t">
+            <a:normAutofit fontScale="100000"/>
+          </a:bodyPr>
+          <a:lstStyle/>
+          <a:p>
+            <a:pPr algn="ctr">
+              <a:lnSpc>
+                <a:spcPct val="106000"/>
+              </a:lnSpc>
+              <a:buNone/>
+              <a:defRPr sz="1175" b="1">
+                <a:solidFill>
+                  <a:srgbClr val="0B1220"/>
+                </a:solidFill>
+                <a:latin typeface="Aptos Mono"/>
+                <a:ea typeface="Aptos Mono"/>
+                <a:cs typeface="Aptos Mono"/>
+              </a:defRPr>
+            </a:pPr>
+            <a:r>
+              <a:rPr sz="1175" b="1">
+                <a:solidFill>
+                  <a:srgbClr val="0B1220"/>
+                </a:solidFill>
+                <a:latin typeface="Aptos Mono"/>
+                <a:ea typeface="Aptos Mono"/>
+                <a:cs typeface="Aptos Mono"/>
+              </a:rPr>
+              <a:t>services:  frontend:  image: todo-frontend:1.0.0  build: ./frontend</a:t>
+            </a:r>
+          </a:p>
+        </p:txBody>
+      </p:sp>
+      <p:sp>
+        <p:nvSpPr>
+          <p:cNvPr id="70" name=""/>
+          <p:cNvSpPr>
+            <a:spLocks noGrp="1"/>
+          </p:cNvSpPr>
+          <p:nvPr/>
+        </p:nvSpPr>
+        <p:spPr>
+          <a:xfrm>
+            <a:off x="685800" y="6305550"/>
+            <a:ext cx="9906000" cy="13335"/>
+          </a:xfrm>
+          <a:prstGeom prst="rect">
+            <a:avLst/>
+          </a:prstGeom>
+          <a:solidFill>
+            <a:srgbClr val="D9E2EC"/>
+          </a:solidFill>
+          <a:ln w="0">
+            <a:noFill/>
+            <a:prstDash val="solid"/>
+          </a:ln>
+        </p:spPr>
+        <p:txBody>
+          <a:bodyPr lIns="0" tIns="0" rIns="0" bIns="0" anchor="t">
+            <a:normAutofit fontScale="100000"/>
+          </a:bodyPr>
+          <a:lstStyle/>
+        </p:txBody>
+      </p:sp>
+      <p:sp>
+        <p:nvSpPr>
+          <p:cNvPr id="71" name=""/>
+          <p:cNvSpPr>
+            <a:spLocks noGrp="1"/>
+          </p:cNvSpPr>
+          <p:nvPr/>
+        </p:nvSpPr>
+        <p:spPr>
+          <a:xfrm>
+            <a:off x="685800" y="6400800"/>
+            <a:ext cx="2762250" cy="171450"/>
+          </a:xfrm>
+          <a:prstGeom prst="rect">
+            <a:avLst/>
+          </a:prstGeom>
+          <a:noFill/>
+          <a:ln w="0">
+            <a:noFill/>
+            <a:prstDash val="solid"/>
+          </a:ln>
+        </p:spPr>
+        <p:txBody>
+          <a:bodyPr lIns="0" tIns="0" rIns="0" bIns="0" anchor="t">
+            <a:normAutofit fontScale="100000"/>
+          </a:bodyPr>
+          <a:lstStyle/>
+          <a:p>
+            <a:pPr algn="l">
+              <a:lnSpc>
+                <a:spcPct val="106000"/>
+              </a:lnSpc>
+              <a:buNone/>
+              <a:defRPr sz="825" b="0">
+                <a:solidFill>
+                  <a:srgbClr val="64748B"/>
+                </a:solidFill>
+                <a:latin typeface="Aptos"/>
+                <a:ea typeface="Aptos"/>
+                <a:cs typeface="Aptos"/>
+              </a:defRPr>
+            </a:pPr>
+            <a:r>
+              <a:rPr sz="825" b="0">
+                <a:solidFill>
+                  <a:srgbClr val="64748B"/>
+                </a:solidFill>
+                <a:latin typeface="Aptos"/>
+                <a:ea typeface="Aptos"/>
+                <a:cs typeface="Aptos"/>
+              </a:rPr>
+              <a:t>Docker 基礎教學｜第 6 堂</a:t>
+            </a:r>
+          </a:p>
+        </p:txBody>
+      </p:sp>
+      <p:sp>
+        <p:nvSpPr>
+          <p:cNvPr id="72" name=""/>
+          <p:cNvSpPr>
+            <a:spLocks noGrp="1"/>
+          </p:cNvSpPr>
+          <p:nvPr/>
+        </p:nvSpPr>
+        <p:spPr>
+          <a:xfrm>
+            <a:off x="10858500" y="6381750"/>
+            <a:ext cx="723900" cy="190500"/>
+          </a:xfrm>
+          <a:prstGeom prst="rect">
+            <a:avLst/>
+          </a:prstGeom>
+          <a:noFill/>
+          <a:ln w="0">
+            <a:noFill/>
+            <a:prstDash val="solid"/>
+          </a:ln>
+        </p:spPr>
+        <p:txBody>
+          <a:bodyPr lIns="0" tIns="0" rIns="0" bIns="0" anchor="t">
+            <a:normAutofit fontScale="100000"/>
+          </a:bodyPr>
+          <a:lstStyle/>
+          <a:p>
+            <a:pPr algn="r">
+              <a:lnSpc>
+                <a:spcPct val="106000"/>
+              </a:lnSpc>
+              <a:buNone/>
+              <a:defRPr sz="900" b="1">
+                <a:solidFill>
+                  <a:srgbClr val="64748B"/>
+                </a:solidFill>
+                <a:latin typeface="Aptos"/>
+                <a:ea typeface="Aptos"/>
+                <a:cs typeface="Aptos"/>
+              </a:defRPr>
+            </a:pPr>
+            <a:r>
+              <a:rPr sz="900" b="1">
+                <a:solidFill>
+                  <a:srgbClr val="64748B"/>
+                </a:solidFill>
+                <a:latin typeface="Aptos"/>
+                <a:ea typeface="Aptos"/>
+                <a:cs typeface="Aptos"/>
+              </a:rPr>
+              <a:t>09B</a:t>
+            </a:r>
+          </a:p>
+        </p:txBody>
+      </p:sp>
+    </p:spTree>
+  </p:cSld>
+  <p:clrMapOvr>
+    <a:masterClrMapping/>
+  </p:clrMapOvr>
+</p:sld>
+</file>
+
 <file path=ppt/slides/slide2.xml><?xml version="1.0" encoding="utf-8"?>
 <p:sld xmlns:p="http://schemas.openxmlformats.org/presentationml/2006/main">
   <p:cSld>
@@ -13881,6 +14679,23 @@
                   <a:srgbClr val="F8FAFC"/>
                 </a:solidFill>
               </a:rPr>
+              <a:t>    image: todo-frontend:1.0.0</a:t>
+            </a:r>
+          </a:p>
+          <a:p xmlns:a="http://schemas.openxmlformats.org/drawingml/2006/main">
+            <a:pPr algn="l">
+              <a:defRPr sz="1275">
+                <a:solidFill>
+                  <a:srgbClr val="F8FAFC"/>
+                </a:solidFill>
+              </a:defRPr>
+            </a:pPr>
+            <a:r>
+              <a:rPr sz="1275">
+                <a:solidFill>
+                  <a:srgbClr val="F8FAFC"/>
+                </a:solidFill>
+              </a:rPr>
               <a:t>    build: ./frontend</a:t>
             </a:r>
           </a:p>
@@ -13938,6 +14753,23 @@
                 </a:solidFill>
               </a:rPr>
               <a:t>  backend:</a:t>
+            </a:r>
+          </a:p>
+          <a:p xmlns:a="http://schemas.openxmlformats.org/drawingml/2006/main">
+            <a:pPr algn="l">
+              <a:defRPr sz="1275">
+                <a:solidFill>
+                  <a:srgbClr val="F8FAFC"/>
+                </a:solidFill>
+              </a:defRPr>
+            </a:pPr>
+            <a:r>
+              <a:rPr sz="1275">
+                <a:solidFill>
+                  <a:srgbClr val="F8FAFC"/>
+                </a:solidFill>
+              </a:rPr>
+              <a:t>    image: todo-backend:1.0.0</a:t>
             </a:r>
           </a:p>
           <a:p xmlns:a="http://schemas.openxmlformats.org/drawingml/2006/main">

--- a/slides/docker-session6-fullstack-todo.pptx
+++ b/slides/docker-session6-fullstack-todo.pptx
@@ -6921,7 +6921,7 @@
                   <a:srgbClr val="F8FAFC"/>
                 </a:solidFill>
               </a:rPr>
-              <a:t>docker compose exec backend sh</a:t>
+              <a:t>docker compose exec backend bash</a:t>
             </a:r>
           </a:p>
           <a:p xmlns:a="http://schemas.openxmlformats.org/drawingml/2006/main">

--- a/slides/docker-session6-fullstack-todo.pptx
+++ b/slides/docker-session6-fullstack-todo.pptx
@@ -13747,11 +13747,11 @@
 </file>
 
 <file path=ppt/slides/slide20.xml><?xml version="1.0" encoding="utf-8"?>
-<p:sld xmlns:p="http://schemas.openxmlformats.org/presentationml/2006/main">
+<p:sld xmlns:a="http://schemas.openxmlformats.org/drawingml/2006/main" xmlns:ns2="http://schemas.microsoft.com/office/drawing/2014/main" xmlns:ns3="http://schemas.microsoft.com/office/powerpoint/2010/main" xmlns:p="http://schemas.openxmlformats.org/presentationml/2006/main">
   <p:cSld>
     <p:bg>
       <p:bgPr>
-        <a:solidFill xmlns:a="http://schemas.openxmlformats.org/drawingml/2006/main">
+        <a:solidFill>
           <a:srgbClr val="0B1220"/>
         </a:solidFill>
       </p:bgPr>
@@ -13763,40 +13763,40 @@
         <p:nvPr/>
       </p:nvGrpSpPr>
       <p:grpSpPr>
-        <a:xfrm xmlns:a="http://schemas.openxmlformats.org/drawingml/2006/main"/>
+        <a:xfrm/>
       </p:grpSpPr>
       <p:sp>
         <p:nvSpPr>
           <p:cNvPr id="1" name="AppendixLabel">
-            <a:extLst xmlns:a="http://schemas.openxmlformats.org/drawingml/2006/main">
-              <a:ext uri="{FF2B5EF4-FFF2-40B4-BE49-F238E27FC236}">
-                <a16:creationId xmlns:a16="http://schemas.microsoft.com/office/drawing/2014/main" id="{DC436DE3-AEA9-4FB6-999C-4C893C47F223}"/>
-              </a:ext>
-            </a:extLst>
-          </p:cNvPr>
-          <p:cNvSpPr>
-            <a:spLocks xmlns:a="http://schemas.openxmlformats.org/drawingml/2006/main" noGrp="1"/>
-          </p:cNvSpPr>
-          <p:nvPr/>
-        </p:nvSpPr>
-        <p:spPr>
-          <a:xfrm xmlns:a="http://schemas.openxmlformats.org/drawingml/2006/main">
+            <a:extLst>
+              <a:ext uri="{FF2B5EF4-FFF2-40B4-BE49-F238E27FC236}">
+                <ns2:creationId id="{DC436DE3-AEA9-4FB6-999C-4C893C47F223}"/>
+              </a:ext>
+            </a:extLst>
+          </p:cNvPr>
+          <p:cNvSpPr>
+            <a:spLocks noGrp="1"/>
+          </p:cNvSpPr>
+          <p:nvPr/>
+        </p:nvSpPr>
+        <p:spPr>
+          <a:xfrm>
             <a:off x="609600" y="419100"/>
             <a:ext cx="2667000" cy="266700"/>
           </a:xfrm>
-          <a:prstGeom xmlns:a="http://schemas.openxmlformats.org/drawingml/2006/main" prst="rect">
+          <a:prstGeom prst="rect">
             <a:avLst/>
           </a:prstGeom>
-          <a:noFill xmlns:a="http://schemas.openxmlformats.org/drawingml/2006/main"/>
-          <a:ln xmlns:a="http://schemas.openxmlformats.org/drawingml/2006/main" w="0">
+          <a:noFill/>
+          <a:ln w="0">
             <a:noFill/>
             <a:prstDash val="solid"/>
           </a:ln>
         </p:spPr>
         <p:txBody>
-          <a:bodyPr xmlns:a="http://schemas.openxmlformats.org/drawingml/2006/main"/>
-          <a:lstStyle xmlns:a="http://schemas.openxmlformats.org/drawingml/2006/main"/>
-          <a:p xmlns:a="http://schemas.openxmlformats.org/drawingml/2006/main">
+          <a:bodyPr/>
+          <a:lstStyle/>
+          <a:p>
             <a:pPr>
               <a:defRPr sz="1050" b="1">
                 <a:solidFill>
@@ -13824,37 +13824,37 @@
       <p:sp>
         <p:nvSpPr>
           <p:cNvPr id="2" name="Title">
-            <a:extLst xmlns:a="http://schemas.openxmlformats.org/drawingml/2006/main">
-              <a:ext uri="{FF2B5EF4-FFF2-40B4-BE49-F238E27FC236}">
-                <a16:creationId xmlns:a16="http://schemas.microsoft.com/office/drawing/2014/main" id="{9D3585D1-6C14-43FE-B627-D55102F1309D}"/>
-              </a:ext>
-            </a:extLst>
-          </p:cNvPr>
-          <p:cNvSpPr>
-            <a:spLocks xmlns:a="http://schemas.openxmlformats.org/drawingml/2006/main" noGrp="1"/>
-          </p:cNvSpPr>
-          <p:nvPr/>
-        </p:nvSpPr>
-        <p:spPr>
-          <a:xfrm xmlns:a="http://schemas.openxmlformats.org/drawingml/2006/main">
+            <a:extLst>
+              <a:ext uri="{FF2B5EF4-FFF2-40B4-BE49-F238E27FC236}">
+                <ns2:creationId id="{9D3585D1-6C14-43FE-B627-D55102F1309D}"/>
+              </a:ext>
+            </a:extLst>
+          </p:cNvPr>
+          <p:cNvSpPr>
+            <a:spLocks noGrp="1"/>
+          </p:cNvSpPr>
+          <p:nvPr/>
+        </p:nvSpPr>
+        <p:spPr>
+          <a:xfrm>
             <a:off x="609600" y="742950"/>
             <a:ext cx="10668000" cy="514350"/>
           </a:xfrm>
-          <a:prstGeom xmlns:a="http://schemas.openxmlformats.org/drawingml/2006/main" prst="rect">
+          <a:prstGeom prst="rect">
             <a:avLst/>
           </a:prstGeom>
-          <a:noFill xmlns:a="http://schemas.openxmlformats.org/drawingml/2006/main"/>
-          <a:ln xmlns:a="http://schemas.openxmlformats.org/drawingml/2006/main" w="0">
+          <a:noFill/>
+          <a:ln w="0">
             <a:noFill/>
             <a:prstDash val="solid"/>
           </a:ln>
         </p:spPr>
         <p:txBody>
-          <a:bodyPr xmlns:a="http://schemas.openxmlformats.org/drawingml/2006/main">
+          <a:bodyPr>
             <a:normAutofit fontScale="100000"/>
           </a:bodyPr>
-          <a:lstStyle xmlns:a="http://schemas.openxmlformats.org/drawingml/2006/main"/>
-          <a:p xmlns:a="http://schemas.openxmlformats.org/drawingml/2006/main">
+          <a:lstStyle/>
+          <a:p>
             <a:pPr>
               <a:defRPr sz="2250" b="1">
                 <a:solidFill>
@@ -13882,35 +13882,35 @@
       <p:sp>
         <p:nvSpPr>
           <p:cNvPr id="3" name="Subtitle">
-            <a:extLst xmlns:a="http://schemas.openxmlformats.org/drawingml/2006/main">
-              <a:ext uri="{FF2B5EF4-FFF2-40B4-BE49-F238E27FC236}">
-                <a16:creationId xmlns:a16="http://schemas.microsoft.com/office/drawing/2014/main" id="{FCBB94D8-0C1E-4341-9F35-A12B20C66905}"/>
-              </a:ext>
-            </a:extLst>
-          </p:cNvPr>
-          <p:cNvSpPr>
-            <a:spLocks xmlns:a="http://schemas.openxmlformats.org/drawingml/2006/main" noGrp="1"/>
-          </p:cNvSpPr>
-          <p:nvPr/>
-        </p:nvSpPr>
-        <p:spPr>
-          <a:xfrm xmlns:a="http://schemas.openxmlformats.org/drawingml/2006/main">
+            <a:extLst>
+              <a:ext uri="{FF2B5EF4-FFF2-40B4-BE49-F238E27FC236}">
+                <ns2:creationId id="{FCBB94D8-0C1E-4341-9F35-A12B20C66905}"/>
+              </a:ext>
+            </a:extLst>
+          </p:cNvPr>
+          <p:cNvSpPr>
+            <a:spLocks noGrp="1"/>
+          </p:cNvSpPr>
+          <p:nvPr/>
+        </p:nvSpPr>
+        <p:spPr>
+          <a:xfrm>
             <a:off x="609600" y="1295400"/>
             <a:ext cx="8001000" cy="285750"/>
           </a:xfrm>
-          <a:prstGeom xmlns:a="http://schemas.openxmlformats.org/drawingml/2006/main" prst="rect">
+          <a:prstGeom prst="rect">
             <a:avLst/>
           </a:prstGeom>
-          <a:noFill xmlns:a="http://schemas.openxmlformats.org/drawingml/2006/main"/>
-          <a:ln xmlns:a="http://schemas.openxmlformats.org/drawingml/2006/main" w="0">
+          <a:noFill/>
+          <a:ln w="0">
             <a:noFill/>
             <a:prstDash val="solid"/>
           </a:ln>
         </p:spPr>
         <p:txBody>
-          <a:bodyPr xmlns:a="http://schemas.openxmlformats.org/drawingml/2006/main"/>
-          <a:lstStyle xmlns:a="http://schemas.openxmlformats.org/drawingml/2006/main"/>
-          <a:p xmlns:a="http://schemas.openxmlformats.org/drawingml/2006/main">
+          <a:bodyPr/>
+          <a:lstStyle/>
+          <a:p>
             <a:pPr>
               <a:defRPr sz="1350">
                 <a:solidFill>
@@ -13938,31 +13938,31 @@
       <p:sp>
         <p:nvSpPr>
           <p:cNvPr id="4" name="CodeBackground">
-            <a:extLst xmlns:a="http://schemas.openxmlformats.org/drawingml/2006/main">
-              <a:ext uri="{FF2B5EF4-FFF2-40B4-BE49-F238E27FC236}">
-                <a16:creationId xmlns:a16="http://schemas.microsoft.com/office/drawing/2014/main" id="{4D972F3C-35A5-4D09-9EC2-B2544925768D}"/>
-              </a:ext>
-            </a:extLst>
-          </p:cNvPr>
-          <p:cNvSpPr>
-            <a:spLocks xmlns:a="http://schemas.openxmlformats.org/drawingml/2006/main" noGrp="1"/>
-          </p:cNvSpPr>
-          <p:nvPr/>
-        </p:nvSpPr>
-        <p:spPr>
-          <a:xfrm xmlns:a="http://schemas.openxmlformats.org/drawingml/2006/main">
+            <a:extLst>
+              <a:ext uri="{FF2B5EF4-FFF2-40B4-BE49-F238E27FC236}">
+                <ns2:creationId id="{4D972F3C-35A5-4D09-9EC2-B2544925768D}"/>
+              </a:ext>
+            </a:extLst>
+          </p:cNvPr>
+          <p:cNvSpPr>
+            <a:spLocks noGrp="1"/>
+          </p:cNvSpPr>
+          <p:nvPr/>
+        </p:nvSpPr>
+        <p:spPr>
+          <a:xfrm>
             <a:off x="609600" y="1676400"/>
             <a:ext cx="10972800" cy="4381500"/>
           </a:xfrm>
-          <a:prstGeom xmlns:a="http://schemas.openxmlformats.org/drawingml/2006/main" prst="roundRect">
+          <a:prstGeom prst="roundRect">
             <a:avLst>
               <a:gd name="adj" fmla="val 3478"/>
             </a:avLst>
           </a:prstGeom>
-          <a:solidFill xmlns:a="http://schemas.openxmlformats.org/drawingml/2006/main">
+          <a:solidFill>
             <a:srgbClr val="111827"/>
           </a:solidFill>
-          <a:ln xmlns:a="http://schemas.openxmlformats.org/drawingml/2006/main" w="9525">
+          <a:ln w="9525">
             <a:solidFill>
               <a:srgbClr val="334155"/>
             </a:solidFill>
@@ -13973,37 +13973,37 @@
       <p:sp>
         <p:nvSpPr>
           <p:cNvPr id="5" name="Code">
-            <a:extLst xmlns:a="http://schemas.openxmlformats.org/drawingml/2006/main">
-              <a:ext uri="{FF2B5EF4-FFF2-40B4-BE49-F238E27FC236}">
-                <a16:creationId xmlns:a16="http://schemas.microsoft.com/office/drawing/2014/main" id="{DFE9970B-4814-4064-8383-E785331A4592}"/>
-              </a:ext>
-            </a:extLst>
-          </p:cNvPr>
-          <p:cNvSpPr>
-            <a:spLocks xmlns:a="http://schemas.openxmlformats.org/drawingml/2006/main" noGrp="1"/>
-          </p:cNvSpPr>
-          <p:nvPr/>
-        </p:nvSpPr>
-        <p:spPr>
-          <a:xfrm xmlns:a="http://schemas.openxmlformats.org/drawingml/2006/main">
+            <a:extLst>
+              <a:ext uri="{FF2B5EF4-FFF2-40B4-BE49-F238E27FC236}">
+                <ns2:creationId id="{DFE9970B-4814-4064-8383-E785331A4592}"/>
+              </a:ext>
+            </a:extLst>
+          </p:cNvPr>
+          <p:cNvSpPr>
+            <a:spLocks noGrp="1"/>
+          </p:cNvSpPr>
+          <p:nvPr/>
+        </p:nvSpPr>
+        <p:spPr>
+          <a:xfrm>
             <a:off x="914400" y="1943100"/>
             <a:ext cx="10363200" cy="3676650"/>
           </a:xfrm>
-          <a:prstGeom xmlns:a="http://schemas.openxmlformats.org/drawingml/2006/main" prst="rect">
+          <a:prstGeom prst="rect">
             <a:avLst/>
           </a:prstGeom>
-          <a:noFill xmlns:a="http://schemas.openxmlformats.org/drawingml/2006/main"/>
-          <a:ln xmlns:a="http://schemas.openxmlformats.org/drawingml/2006/main" w="0">
+          <a:noFill/>
+          <a:ln w="0">
             <a:noFill/>
             <a:prstDash val="solid"/>
           </a:ln>
         </p:spPr>
         <p:txBody>
-          <a:bodyPr xmlns:a="http://schemas.openxmlformats.org/drawingml/2006/main" wrap="none" lIns="0" tIns="0" rIns="0" bIns="0">
+          <a:bodyPr wrap="none" lIns="0" tIns="0" rIns="0" bIns="0">
             <a:normAutofit fontScale="100000"/>
           </a:bodyPr>
-          <a:lstStyle xmlns:a="http://schemas.openxmlformats.org/drawingml/2006/main"/>
-          <a:p xmlns:a="http://schemas.openxmlformats.org/drawingml/2006/main">
+          <a:lstStyle/>
+          <a:p>
             <a:pPr>
               <a:defRPr sz="1125">
                 <a:solidFill>
@@ -14026,7 +14026,7 @@
               <a:t xml:space="preserve">        condition: service_healthy</a:t>
             </a:r>
           </a:p>
-          <a:p xmlns:a="http://schemas.openxmlformats.org/drawingml/2006/main">
+          <a:p>
             <a:pPr>
               <a:defRPr sz="1125">
                 <a:solidFill>
@@ -14049,7 +14049,7 @@
               <a:t/>
             </a:r>
           </a:p>
-          <a:p xmlns:a="http://schemas.openxmlformats.org/drawingml/2006/main">
+          <a:p>
             <a:pPr>
               <a:defRPr sz="1125">
                 <a:solidFill>
@@ -14072,7 +14072,7 @@
               <a:t xml:space="preserve">  db:</a:t>
             </a:r>
           </a:p>
-          <a:p xmlns:a="http://schemas.openxmlformats.org/drawingml/2006/main">
+          <a:p>
             <a:pPr>
               <a:defRPr sz="1125">
                 <a:solidFill>
@@ -14095,7 +14095,7 @@
               <a:t xml:space="preserve">    image: mysql:8.0</a:t>
             </a:r>
           </a:p>
-          <a:p xmlns:a="http://schemas.openxmlformats.org/drawingml/2006/main">
+          <a:p>
             <a:pPr>
               <a:defRPr sz="1125">
                 <a:solidFill>
@@ -14118,7 +14118,7 @@
               <a:t xml:space="preserve">    environment:</a:t>
             </a:r>
           </a:p>
-          <a:p xmlns:a="http://schemas.openxmlformats.org/drawingml/2006/main">
+          <a:p>
             <a:pPr>
               <a:defRPr sz="1125">
                 <a:solidFill>
@@ -14141,7 +14141,7 @@
               <a:t xml:space="preserve">      MYSQL_ROOT_PASSWORD: ${MYSQL_ROOT_PASSWORD}</a:t>
             </a:r>
           </a:p>
-          <a:p xmlns:a="http://schemas.openxmlformats.org/drawingml/2006/main">
+          <a:p>
             <a:pPr>
               <a:defRPr sz="1125">
                 <a:solidFill>
@@ -14164,7 +14164,7 @@
               <a:t xml:space="preserve">      MYSQL_DATABASE: ${MYSQL_DATABASE}</a:t>
             </a:r>
           </a:p>
-          <a:p xmlns:a="http://schemas.openxmlformats.org/drawingml/2006/main">
+          <a:p>
             <a:pPr>
               <a:defRPr sz="1125">
                 <a:solidFill>
@@ -14187,7 +14187,7 @@
               <a:t xml:space="preserve">      MYSQL_USER: ${MYSQL_USER}</a:t>
             </a:r>
           </a:p>
-          <a:p xmlns:a="http://schemas.openxmlformats.org/drawingml/2006/main">
+          <a:p>
             <a:pPr>
               <a:defRPr sz="1125">
                 <a:solidFill>
@@ -14210,7 +14210,7 @@
               <a:t xml:space="preserve">      MYSQL_PASSWORD: ${MYSQL_PASSWORD}</a:t>
             </a:r>
           </a:p>
-          <a:p xmlns:a="http://schemas.openxmlformats.org/drawingml/2006/main">
+          <a:p>
             <a:pPr>
               <a:defRPr sz="1125">
                 <a:solidFill>
@@ -14233,7 +14233,7 @@
               <a:t xml:space="preserve">    volumes:</a:t>
             </a:r>
           </a:p>
-          <a:p xmlns:a="http://schemas.openxmlformats.org/drawingml/2006/main">
+          <a:p>
             <a:pPr>
               <a:defRPr sz="1125">
                 <a:solidFill>
@@ -14256,7 +14256,7 @@
               <a:t xml:space="preserve">      - todo-db-data:/var/lib/mysql</a:t>
             </a:r>
           </a:p>
-          <a:p xmlns:a="http://schemas.openxmlformats.org/drawingml/2006/main">
+          <a:p>
             <a:pPr>
               <a:defRPr sz="1125">
                 <a:solidFill>
@@ -14279,7 +14279,7 @@
               <a:t xml:space="preserve">      - ./db/init.sql:/docker-entrypoint-initdb.d/init.sql:ro</a:t>
             </a:r>
           </a:p>
-          <a:p xmlns:a="http://schemas.openxmlformats.org/drawingml/2006/main">
+          <a:p>
             <a:pPr>
               <a:defRPr sz="1125">
                 <a:solidFill>
@@ -14302,30 +14302,145 @@
               <a:t xml:space="preserve">    healthcheck:</a:t>
             </a:r>
           </a:p>
-          <a:p xmlns:a="http://schemas.openxmlformats.org/drawingml/2006/main">
-            <a:pPr>
-              <a:defRPr sz="1125">
-                <a:solidFill>
-                  <a:srgbClr val="E5E7EB"/>
-                </a:solidFill>
-                <a:latin typeface="Consolas"/>
-                <a:ea typeface="Consolas"/>
-                <a:cs typeface="Consolas"/>
-              </a:defRPr>
-            </a:pPr>
-            <a:r>
-              <a:rPr sz="1125">
-                <a:solidFill>
-                  <a:srgbClr val="E5E7EB"/>
-                </a:solidFill>
-                <a:latin typeface="Consolas"/>
-                <a:ea typeface="Consolas"/>
-                <a:cs typeface="Consolas"/>
-              </a:rPr>
-              <a:t xml:space="preserve">      test: ["CMD", "mysqladmin", "ping", "-h", "localhost"]</a:t>
-            </a:r>
-          </a:p>
-          <a:p xmlns:a="http://schemas.openxmlformats.org/drawingml/2006/main">
+          <a:p>
+            <a:pPr>
+              <a:defRPr sz="1125">
+                <a:solidFill>
+                  <a:srgbClr val="E5E7EB"/>
+                </a:solidFill>
+                <a:latin typeface="Consolas"/>
+                <a:ea typeface="Consolas"/>
+                <a:cs typeface="Consolas"/>
+              </a:defRPr>
+            </a:pPr>
+            <a:r>
+              <a:rPr sz="1125">
+                <a:solidFill>
+                  <a:srgbClr val="E5E7EB"/>
+                </a:solidFill>
+                <a:latin typeface="Consolas"/>
+                <a:ea typeface="Consolas"/>
+                <a:cs typeface="Consolas"/>
+              </a:rPr>
+              <a:t xml:space="preserve">      test:</a:t>
+            </a:r>
+          </a:p>
+          <a:p>
+            <a:pPr>
+              <a:defRPr sz="1125">
+                <a:solidFill>
+                  <a:srgbClr val="E5E7EB"/>
+                </a:solidFill>
+                <a:latin typeface="Consolas"/>
+                <a:ea typeface="Consolas"/>
+                <a:cs typeface="Consolas"/>
+              </a:defRPr>
+            </a:pPr>
+            <a:r>
+              <a:rPr sz="1125">
+                <a:solidFill>
+                  <a:srgbClr val="E5E7EB"/>
+                </a:solidFill>
+                <a:latin typeface="Consolas"/>
+                <a:ea typeface="Consolas"/>
+                <a:cs typeface="Consolas"/>
+              </a:rPr>
+              <a:t xml:space="preserve">        - CMD</a:t>
+            </a:r>
+          </a:p>
+          <a:p>
+            <a:pPr>
+              <a:defRPr sz="1125">
+                <a:solidFill>
+                  <a:srgbClr val="E5E7EB"/>
+                </a:solidFill>
+                <a:latin typeface="Consolas"/>
+                <a:ea typeface="Consolas"/>
+                <a:cs typeface="Consolas"/>
+              </a:defRPr>
+            </a:pPr>
+            <a:r>
+              <a:rPr sz="1125">
+                <a:solidFill>
+                  <a:srgbClr val="E5E7EB"/>
+                </a:solidFill>
+                <a:latin typeface="Consolas"/>
+                <a:ea typeface="Consolas"/>
+                <a:cs typeface="Consolas"/>
+              </a:rPr>
+              <a:t xml:space="preserve">        - mysqladmin</a:t>
+            </a:r>
+          </a:p>
+          <a:p>
+            <a:pPr>
+              <a:defRPr sz="1125">
+                <a:solidFill>
+                  <a:srgbClr val="E5E7EB"/>
+                </a:solidFill>
+                <a:latin typeface="Consolas"/>
+                <a:ea typeface="Consolas"/>
+                <a:cs typeface="Consolas"/>
+              </a:defRPr>
+            </a:pPr>
+            <a:r>
+              <a:rPr sz="1125">
+                <a:solidFill>
+                  <a:srgbClr val="E5E7EB"/>
+                </a:solidFill>
+                <a:latin typeface="Consolas"/>
+                <a:ea typeface="Consolas"/>
+                <a:cs typeface="Consolas"/>
+              </a:rPr>
+              <a:t xml:space="preserve">        - ping</a:t>
+            </a:r>
+          </a:p>
+          <a:p>
+            <a:pPr>
+              <a:defRPr sz="1125">
+                <a:solidFill>
+                  <a:srgbClr val="E5E7EB"/>
+                </a:solidFill>
+                <a:latin typeface="Consolas"/>
+                <a:ea typeface="Consolas"/>
+                <a:cs typeface="Consolas"/>
+              </a:defRPr>
+            </a:pPr>
+            <a:r>
+              <a:rPr sz="1125">
+                <a:solidFill>
+                  <a:srgbClr val="E5E7EB"/>
+                </a:solidFill>
+                <a:latin typeface="Consolas"/>
+                <a:ea typeface="Consolas"/>
+                <a:cs typeface="Consolas"/>
+              </a:rPr>
+              <a:t xml:space="preserve">        - "-h"</a:t>
+            </a:r>
+          </a:p>
+          <a:p>
+            <a:pPr>
+              <a:defRPr sz="1125">
+                <a:solidFill>
+                  <a:srgbClr val="E5E7EB"/>
+                </a:solidFill>
+                <a:latin typeface="Consolas"/>
+                <a:ea typeface="Consolas"/>
+                <a:cs typeface="Consolas"/>
+              </a:defRPr>
+            </a:pPr>
+            <a:r>
+              <a:rPr sz="1125">
+                <a:solidFill>
+                  <a:srgbClr val="E5E7EB"/>
+                </a:solidFill>
+                <a:latin typeface="Consolas"/>
+                <a:ea typeface="Consolas"/>
+                <a:cs typeface="Consolas"/>
+              </a:rPr>
+              <a:t xml:space="preserve">        - localhost</a:t>
+            </a:r>
+          </a:p>
+          <a:p>
             <a:pPr>
               <a:defRPr sz="1125">
                 <a:solidFill>
@@ -14348,7 +14463,7 @@
               <a:t xml:space="preserve">      interval: 5s</a:t>
             </a:r>
           </a:p>
-          <a:p xmlns:a="http://schemas.openxmlformats.org/drawingml/2006/main">
+          <a:p>
             <a:pPr>
               <a:defRPr sz="1125">
                 <a:solidFill>
@@ -14371,7 +14486,7 @@
               <a:t xml:space="preserve">      timeout: 5s</a:t>
             </a:r>
           </a:p>
-          <a:p xmlns:a="http://schemas.openxmlformats.org/drawingml/2006/main">
+          <a:p>
             <a:pPr>
               <a:defRPr sz="1125">
                 <a:solidFill>
@@ -14394,7 +14509,7 @@
               <a:t xml:space="preserve">      retries: 10</a:t>
             </a:r>
           </a:p>
-          <a:p xmlns:a="http://schemas.openxmlformats.org/drawingml/2006/main">
+          <a:p>
             <a:pPr>
               <a:defRPr sz="1125">
                 <a:solidFill>
@@ -14417,7 +14532,7 @@
               <a:t/>
             </a:r>
           </a:p>
-          <a:p xmlns:a="http://schemas.openxmlformats.org/drawingml/2006/main">
+          <a:p>
             <a:pPr>
               <a:defRPr sz="1125">
                 <a:solidFill>
@@ -14440,7 +14555,7 @@
               <a:t>volumes:</a:t>
             </a:r>
           </a:p>
-          <a:p xmlns:a="http://schemas.openxmlformats.org/drawingml/2006/main">
+          <a:p>
             <a:pPr>
               <a:defRPr sz="1125">
                 <a:solidFill>
@@ -14468,35 +14583,35 @@
       <p:sp>
         <p:nvSpPr>
           <p:cNvPr id="6" name="Footer">
-            <a:extLst xmlns:a="http://schemas.openxmlformats.org/drawingml/2006/main">
-              <a:ext uri="{FF2B5EF4-FFF2-40B4-BE49-F238E27FC236}">
-                <a16:creationId xmlns:a16="http://schemas.microsoft.com/office/drawing/2014/main" id="{07E5D6DC-1325-438C-867F-738996D14A27}"/>
-              </a:ext>
-            </a:extLst>
-          </p:cNvPr>
-          <p:cNvSpPr>
-            <a:spLocks xmlns:a="http://schemas.openxmlformats.org/drawingml/2006/main" noGrp="1"/>
-          </p:cNvSpPr>
-          <p:nvPr/>
-        </p:nvSpPr>
-        <p:spPr>
-          <a:xfrm xmlns:a="http://schemas.openxmlformats.org/drawingml/2006/main">
+            <a:extLst>
+              <a:ext uri="{FF2B5EF4-FFF2-40B4-BE49-F238E27FC236}">
+                <ns2:creationId id="{07E5D6DC-1325-438C-867F-738996D14A27}"/>
+              </a:ext>
+            </a:extLst>
+          </p:cNvPr>
+          <p:cNvSpPr>
+            <a:spLocks noGrp="1"/>
+          </p:cNvSpPr>
+          <p:nvPr/>
+        </p:nvSpPr>
+        <p:spPr>
+          <a:xfrm>
             <a:off x="609600" y="6400800"/>
             <a:ext cx="6667500" cy="228600"/>
           </a:xfrm>
-          <a:prstGeom xmlns:a="http://schemas.openxmlformats.org/drawingml/2006/main" prst="rect">
+          <a:prstGeom prst="rect">
             <a:avLst/>
           </a:prstGeom>
-          <a:noFill xmlns:a="http://schemas.openxmlformats.org/drawingml/2006/main"/>
-          <a:ln xmlns:a="http://schemas.openxmlformats.org/drawingml/2006/main" w="0">
+          <a:noFill/>
+          <a:ln w="0">
             <a:noFill/>
             <a:prstDash val="solid"/>
           </a:ln>
         </p:spPr>
         <p:txBody>
-          <a:bodyPr xmlns:a="http://schemas.openxmlformats.org/drawingml/2006/main"/>
-          <a:lstStyle xmlns:a="http://schemas.openxmlformats.org/drawingml/2006/main"/>
-          <a:p xmlns:a="http://schemas.openxmlformats.org/drawingml/2006/main">
+          <a:bodyPr/>
+          <a:lstStyle/>
+          <a:p>
             <a:pPr>
               <a:defRPr sz="900">
                 <a:solidFill>
@@ -14524,35 +14639,35 @@
       <p:sp>
         <p:nvSpPr>
           <p:cNvPr id="7" name="Page">
-            <a:extLst xmlns:a="http://schemas.openxmlformats.org/drawingml/2006/main">
-              <a:ext uri="{FF2B5EF4-FFF2-40B4-BE49-F238E27FC236}">
-                <a16:creationId xmlns:a16="http://schemas.microsoft.com/office/drawing/2014/main" id="{0ABD30E2-E89D-4E47-B491-9D0B7369A687}"/>
-              </a:ext>
-            </a:extLst>
-          </p:cNvPr>
-          <p:cNvSpPr>
-            <a:spLocks xmlns:a="http://schemas.openxmlformats.org/drawingml/2006/main" noGrp="1"/>
-          </p:cNvSpPr>
-          <p:nvPr/>
-        </p:nvSpPr>
-        <p:spPr>
-          <a:xfrm xmlns:a="http://schemas.openxmlformats.org/drawingml/2006/main">
+            <a:extLst>
+              <a:ext uri="{FF2B5EF4-FFF2-40B4-BE49-F238E27FC236}">
+                <ns2:creationId id="{0ABD30E2-E89D-4E47-B491-9D0B7369A687}"/>
+              </a:ext>
+            </a:extLst>
+          </p:cNvPr>
+          <p:cNvSpPr>
+            <a:spLocks noGrp="1"/>
+          </p:cNvSpPr>
+          <p:nvPr/>
+        </p:nvSpPr>
+        <p:spPr>
+          <a:xfrm>
             <a:off x="10934700" y="6400800"/>
             <a:ext cx="762000" cy="228600"/>
           </a:xfrm>
-          <a:prstGeom xmlns:a="http://schemas.openxmlformats.org/drawingml/2006/main" prst="rect">
+          <a:prstGeom prst="rect">
             <a:avLst/>
           </a:prstGeom>
-          <a:noFill xmlns:a="http://schemas.openxmlformats.org/drawingml/2006/main"/>
-          <a:ln xmlns:a="http://schemas.openxmlformats.org/drawingml/2006/main" w="0">
+          <a:noFill/>
+          <a:ln w="0">
             <a:noFill/>
             <a:prstDash val="solid"/>
           </a:ln>
         </p:spPr>
         <p:txBody>
-          <a:bodyPr xmlns:a="http://schemas.openxmlformats.org/drawingml/2006/main"/>
-          <a:lstStyle xmlns:a="http://schemas.openxmlformats.org/drawingml/2006/main"/>
-          <a:p xmlns:a="http://schemas.openxmlformats.org/drawingml/2006/main">
+          <a:bodyPr/>
+          <a:lstStyle/>
+          <a:p>
             <a:pPr algn="r">
               <a:defRPr sz="900">
                 <a:solidFill>
@@ -14580,7 +14695,7 @@
     </p:spTree>
     <p:extLst>
       <p:ext uri="{BB962C8B-B14F-4D97-AF65-F5344CB8AC3E}">
-        <p14:creationId xmlns:p14="http://schemas.microsoft.com/office/powerpoint/2010/main" val="1983827639"/>
+        <ns3:creationId val="1983827639"/>
       </p:ext>
     </p:extLst>
   </p:cSld>
@@ -35821,11 +35936,11 @@
 </file>
 
 <file path=ppt/slides/slide47.xml><?xml version="1.0" encoding="utf-8"?>
-<p:sld xmlns:p="http://schemas.openxmlformats.org/presentationml/2006/main">
+<p:sld xmlns:a="http://schemas.openxmlformats.org/drawingml/2006/main" xmlns:ns2="http://schemas.microsoft.com/office/drawing/2014/main" xmlns:ns3="http://schemas.microsoft.com/office/powerpoint/2010/main" xmlns:p="http://schemas.openxmlformats.org/presentationml/2006/main">
   <p:cSld>
     <p:bg>
       <p:bgPr>
-        <a:solidFill xmlns:a="http://schemas.openxmlformats.org/drawingml/2006/main">
+        <a:solidFill>
           <a:srgbClr val="0B1220"/>
         </a:solidFill>
       </p:bgPr>
@@ -35837,40 +35952,40 @@
         <p:nvPr/>
       </p:nvGrpSpPr>
       <p:grpSpPr>
-        <a:xfrm xmlns:a="http://schemas.openxmlformats.org/drawingml/2006/main"/>
+        <a:xfrm/>
       </p:grpSpPr>
       <p:sp>
         <p:nvSpPr>
           <p:cNvPr id="1" name="AppendixLabel">
-            <a:extLst xmlns:a="http://schemas.openxmlformats.org/drawingml/2006/main">
-              <a:ext uri="{FF2B5EF4-FFF2-40B4-BE49-F238E27FC236}">
-                <a16:creationId xmlns:a16="http://schemas.microsoft.com/office/drawing/2014/main" id="{DC436DE3-AEA9-4FB6-999C-4C893C47F223}"/>
-              </a:ext>
-            </a:extLst>
-          </p:cNvPr>
-          <p:cNvSpPr>
-            <a:spLocks xmlns:a="http://schemas.openxmlformats.org/drawingml/2006/main" noGrp="1"/>
-          </p:cNvSpPr>
-          <p:nvPr/>
-        </p:nvSpPr>
-        <p:spPr>
-          <a:xfrm xmlns:a="http://schemas.openxmlformats.org/drawingml/2006/main">
+            <a:extLst>
+              <a:ext uri="{FF2B5EF4-FFF2-40B4-BE49-F238E27FC236}">
+                <ns2:creationId id="{DC436DE3-AEA9-4FB6-999C-4C893C47F223}"/>
+              </a:ext>
+            </a:extLst>
+          </p:cNvPr>
+          <p:cNvSpPr>
+            <a:spLocks noGrp="1"/>
+          </p:cNvSpPr>
+          <p:nvPr/>
+        </p:nvSpPr>
+        <p:spPr>
+          <a:xfrm>
             <a:off x="609600" y="419100"/>
             <a:ext cx="2667000" cy="266700"/>
           </a:xfrm>
-          <a:prstGeom xmlns:a="http://schemas.openxmlformats.org/drawingml/2006/main" prst="rect">
+          <a:prstGeom prst="rect">
             <a:avLst/>
           </a:prstGeom>
-          <a:noFill xmlns:a="http://schemas.openxmlformats.org/drawingml/2006/main"/>
-          <a:ln xmlns:a="http://schemas.openxmlformats.org/drawingml/2006/main" w="0">
+          <a:noFill/>
+          <a:ln w="0">
             <a:noFill/>
             <a:prstDash val="solid"/>
           </a:ln>
         </p:spPr>
         <p:txBody>
-          <a:bodyPr xmlns:a="http://schemas.openxmlformats.org/drawingml/2006/main"/>
-          <a:lstStyle xmlns:a="http://schemas.openxmlformats.org/drawingml/2006/main"/>
-          <a:p xmlns:a="http://schemas.openxmlformats.org/drawingml/2006/main">
+          <a:bodyPr/>
+          <a:lstStyle/>
+          <a:p>
             <a:pPr>
               <a:defRPr sz="1050" b="1">
                 <a:solidFill>
@@ -35898,37 +36013,37 @@
       <p:sp>
         <p:nvSpPr>
           <p:cNvPr id="2" name="Title">
-            <a:extLst xmlns:a="http://schemas.openxmlformats.org/drawingml/2006/main">
-              <a:ext uri="{FF2B5EF4-FFF2-40B4-BE49-F238E27FC236}">
-                <a16:creationId xmlns:a16="http://schemas.microsoft.com/office/drawing/2014/main" id="{9D3585D1-6C14-43FE-B627-D55102F1309D}"/>
-              </a:ext>
-            </a:extLst>
-          </p:cNvPr>
-          <p:cNvSpPr>
-            <a:spLocks xmlns:a="http://schemas.openxmlformats.org/drawingml/2006/main" noGrp="1"/>
-          </p:cNvSpPr>
-          <p:nvPr/>
-        </p:nvSpPr>
-        <p:spPr>
-          <a:xfrm xmlns:a="http://schemas.openxmlformats.org/drawingml/2006/main">
+            <a:extLst>
+              <a:ext uri="{FF2B5EF4-FFF2-40B4-BE49-F238E27FC236}">
+                <ns2:creationId id="{9D3585D1-6C14-43FE-B627-D55102F1309D}"/>
+              </a:ext>
+            </a:extLst>
+          </p:cNvPr>
+          <p:cNvSpPr>
+            <a:spLocks noGrp="1"/>
+          </p:cNvSpPr>
+          <p:nvPr/>
+        </p:nvSpPr>
+        <p:spPr>
+          <a:xfrm>
             <a:off x="609600" y="742950"/>
             <a:ext cx="10668000" cy="514350"/>
           </a:xfrm>
-          <a:prstGeom xmlns:a="http://schemas.openxmlformats.org/drawingml/2006/main" prst="rect">
+          <a:prstGeom prst="rect">
             <a:avLst/>
           </a:prstGeom>
-          <a:noFill xmlns:a="http://schemas.openxmlformats.org/drawingml/2006/main"/>
-          <a:ln xmlns:a="http://schemas.openxmlformats.org/drawingml/2006/main" w="0">
+          <a:noFill/>
+          <a:ln w="0">
             <a:noFill/>
             <a:prstDash val="solid"/>
           </a:ln>
         </p:spPr>
         <p:txBody>
-          <a:bodyPr xmlns:a="http://schemas.openxmlformats.org/drawingml/2006/main">
+          <a:bodyPr>
             <a:normAutofit fontScale="100000"/>
           </a:bodyPr>
-          <a:lstStyle xmlns:a="http://schemas.openxmlformats.org/drawingml/2006/main"/>
-          <a:p xmlns:a="http://schemas.openxmlformats.org/drawingml/2006/main">
+          <a:lstStyle/>
+          <a:p>
             <a:pPr>
               <a:defRPr sz="2250" b="1">
                 <a:solidFill>
@@ -35956,35 +36071,35 @@
       <p:sp>
         <p:nvSpPr>
           <p:cNvPr id="3" name="Subtitle">
-            <a:extLst xmlns:a="http://schemas.openxmlformats.org/drawingml/2006/main">
-              <a:ext uri="{FF2B5EF4-FFF2-40B4-BE49-F238E27FC236}">
-                <a16:creationId xmlns:a16="http://schemas.microsoft.com/office/drawing/2014/main" id="{FCBB94D8-0C1E-4341-9F35-A12B20C66905}"/>
-              </a:ext>
-            </a:extLst>
-          </p:cNvPr>
-          <p:cNvSpPr>
-            <a:spLocks xmlns:a="http://schemas.openxmlformats.org/drawingml/2006/main" noGrp="1"/>
-          </p:cNvSpPr>
-          <p:nvPr/>
-        </p:nvSpPr>
-        <p:spPr>
-          <a:xfrm xmlns:a="http://schemas.openxmlformats.org/drawingml/2006/main">
+            <a:extLst>
+              <a:ext uri="{FF2B5EF4-FFF2-40B4-BE49-F238E27FC236}">
+                <ns2:creationId id="{FCBB94D8-0C1E-4341-9F35-A12B20C66905}"/>
+              </a:ext>
+            </a:extLst>
+          </p:cNvPr>
+          <p:cNvSpPr>
+            <a:spLocks noGrp="1"/>
+          </p:cNvSpPr>
+          <p:nvPr/>
+        </p:nvSpPr>
+        <p:spPr>
+          <a:xfrm>
             <a:off x="609600" y="1295400"/>
             <a:ext cx="8001000" cy="285750"/>
           </a:xfrm>
-          <a:prstGeom xmlns:a="http://schemas.openxmlformats.org/drawingml/2006/main" prst="rect">
+          <a:prstGeom prst="rect">
             <a:avLst/>
           </a:prstGeom>
-          <a:noFill xmlns:a="http://schemas.openxmlformats.org/drawingml/2006/main"/>
-          <a:ln xmlns:a="http://schemas.openxmlformats.org/drawingml/2006/main" w="0">
+          <a:noFill/>
+          <a:ln w="0">
             <a:noFill/>
             <a:prstDash val="solid"/>
           </a:ln>
         </p:spPr>
         <p:txBody>
-          <a:bodyPr xmlns:a="http://schemas.openxmlformats.org/drawingml/2006/main"/>
-          <a:lstStyle xmlns:a="http://schemas.openxmlformats.org/drawingml/2006/main"/>
-          <a:p xmlns:a="http://schemas.openxmlformats.org/drawingml/2006/main">
+          <a:bodyPr/>
+          <a:lstStyle/>
+          <a:p>
             <a:pPr>
               <a:defRPr sz="1350">
                 <a:solidFill>
@@ -36012,31 +36127,31 @@
       <p:sp>
         <p:nvSpPr>
           <p:cNvPr id="4" name="CodeBackground">
-            <a:extLst xmlns:a="http://schemas.openxmlformats.org/drawingml/2006/main">
-              <a:ext uri="{FF2B5EF4-FFF2-40B4-BE49-F238E27FC236}">
-                <a16:creationId xmlns:a16="http://schemas.microsoft.com/office/drawing/2014/main" id="{4D972F3C-35A5-4D09-9EC2-B2544925768D}"/>
-              </a:ext>
-            </a:extLst>
-          </p:cNvPr>
-          <p:cNvSpPr>
-            <a:spLocks xmlns:a="http://schemas.openxmlformats.org/drawingml/2006/main" noGrp="1"/>
-          </p:cNvSpPr>
-          <p:nvPr/>
-        </p:nvSpPr>
-        <p:spPr>
-          <a:xfrm xmlns:a="http://schemas.openxmlformats.org/drawingml/2006/main">
+            <a:extLst>
+              <a:ext uri="{FF2B5EF4-FFF2-40B4-BE49-F238E27FC236}">
+                <ns2:creationId id="{4D972F3C-35A5-4D09-9EC2-B2544925768D}"/>
+              </a:ext>
+            </a:extLst>
+          </p:cNvPr>
+          <p:cNvSpPr>
+            <a:spLocks noGrp="1"/>
+          </p:cNvSpPr>
+          <p:nvPr/>
+        </p:nvSpPr>
+        <p:spPr>
+          <a:xfrm>
             <a:off x="609600" y="1676400"/>
             <a:ext cx="10972800" cy="4381500"/>
           </a:xfrm>
-          <a:prstGeom xmlns:a="http://schemas.openxmlformats.org/drawingml/2006/main" prst="roundRect">
+          <a:prstGeom prst="roundRect">
             <a:avLst>
               <a:gd name="adj" fmla="val 3478"/>
             </a:avLst>
           </a:prstGeom>
-          <a:solidFill xmlns:a="http://schemas.openxmlformats.org/drawingml/2006/main">
+          <a:solidFill>
             <a:srgbClr val="111827"/>
           </a:solidFill>
-          <a:ln xmlns:a="http://schemas.openxmlformats.org/drawingml/2006/main" w="9525">
+          <a:ln w="9525">
             <a:solidFill>
               <a:srgbClr val="334155"/>
             </a:solidFill>
@@ -36047,37 +36162,37 @@
       <p:sp>
         <p:nvSpPr>
           <p:cNvPr id="5" name="Code">
-            <a:extLst xmlns:a="http://schemas.openxmlformats.org/drawingml/2006/main">
-              <a:ext uri="{FF2B5EF4-FFF2-40B4-BE49-F238E27FC236}">
-                <a16:creationId xmlns:a16="http://schemas.microsoft.com/office/drawing/2014/main" id="{DFE9970B-4814-4064-8383-E785331A4592}"/>
-              </a:ext>
-            </a:extLst>
-          </p:cNvPr>
-          <p:cNvSpPr>
-            <a:spLocks xmlns:a="http://schemas.openxmlformats.org/drawingml/2006/main" noGrp="1"/>
-          </p:cNvSpPr>
-          <p:nvPr/>
-        </p:nvSpPr>
-        <p:spPr>
-          <a:xfrm xmlns:a="http://schemas.openxmlformats.org/drawingml/2006/main">
+            <a:extLst>
+              <a:ext uri="{FF2B5EF4-FFF2-40B4-BE49-F238E27FC236}">
+                <ns2:creationId id="{DFE9970B-4814-4064-8383-E785331A4592}"/>
+              </a:ext>
+            </a:extLst>
+          </p:cNvPr>
+          <p:cNvSpPr>
+            <a:spLocks noGrp="1"/>
+          </p:cNvSpPr>
+          <p:nvPr/>
+        </p:nvSpPr>
+        <p:spPr>
+          <a:xfrm>
             <a:off x="914400" y="1943100"/>
             <a:ext cx="10363200" cy="3676650"/>
           </a:xfrm>
-          <a:prstGeom xmlns:a="http://schemas.openxmlformats.org/drawingml/2006/main" prst="rect">
+          <a:prstGeom prst="rect">
             <a:avLst/>
           </a:prstGeom>
-          <a:noFill xmlns:a="http://schemas.openxmlformats.org/drawingml/2006/main"/>
-          <a:ln xmlns:a="http://schemas.openxmlformats.org/drawingml/2006/main" w="0">
+          <a:noFill/>
+          <a:ln w="0">
             <a:noFill/>
             <a:prstDash val="solid"/>
           </a:ln>
         </p:spPr>
         <p:txBody>
-          <a:bodyPr xmlns:a="http://schemas.openxmlformats.org/drawingml/2006/main" wrap="none" lIns="0" tIns="0" rIns="0" bIns="0">
+          <a:bodyPr wrap="none" lIns="0" tIns="0" rIns="0" bIns="0">
             <a:normAutofit fontScale="97475"/>
           </a:bodyPr>
-          <a:lstStyle xmlns:a="http://schemas.openxmlformats.org/drawingml/2006/main"/>
-          <a:p xmlns:a="http://schemas.openxmlformats.org/drawingml/2006/main">
+          <a:lstStyle/>
+          <a:p>
             <a:pPr>
               <a:defRPr sz="1125">
                 <a:solidFill>
@@ -36100,7 +36215,7 @@
               <a:t>name: Fullstack Todo CI/CD</a:t>
             </a:r>
           </a:p>
-          <a:p xmlns:a="http://schemas.openxmlformats.org/drawingml/2006/main">
+          <a:p>
             <a:pPr>
               <a:defRPr sz="1125">
                 <a:solidFill>
@@ -36123,7 +36238,7 @@
               <a:t/>
             </a:r>
           </a:p>
-          <a:p xmlns:a="http://schemas.openxmlformats.org/drawingml/2006/main">
+          <a:p>
             <a:pPr>
               <a:defRPr sz="1125">
                 <a:solidFill>
@@ -36146,7 +36261,7 @@
               <a:t>on:</a:t>
             </a:r>
           </a:p>
-          <a:p xmlns:a="http://schemas.openxmlformats.org/drawingml/2006/main">
+          <a:p>
             <a:pPr>
               <a:defRPr sz="1125">
                 <a:solidFill>
@@ -36169,30 +36284,53 @@
               <a:t xml:space="preserve">  push:</a:t>
             </a:r>
           </a:p>
-          <a:p xmlns:a="http://schemas.openxmlformats.org/drawingml/2006/main">
-            <a:pPr>
-              <a:defRPr sz="1125">
-                <a:solidFill>
-                  <a:srgbClr val="E5E7EB"/>
-                </a:solidFill>
-                <a:latin typeface="Consolas"/>
-                <a:ea typeface="Consolas"/>
-                <a:cs typeface="Consolas"/>
-              </a:defRPr>
-            </a:pPr>
-            <a:r>
-              <a:rPr sz="1125">
-                <a:solidFill>
-                  <a:srgbClr val="E5E7EB"/>
-                </a:solidFill>
-                <a:latin typeface="Consolas"/>
-                <a:ea typeface="Consolas"/>
-                <a:cs typeface="Consolas"/>
-              </a:rPr>
-              <a:t xml:space="preserve">    branches: [ main ]</a:t>
-            </a:r>
-          </a:p>
-          <a:p xmlns:a="http://schemas.openxmlformats.org/drawingml/2006/main">
+          <a:p>
+            <a:pPr>
+              <a:defRPr sz="1125">
+                <a:solidFill>
+                  <a:srgbClr val="E5E7EB"/>
+                </a:solidFill>
+                <a:latin typeface="Consolas"/>
+                <a:ea typeface="Consolas"/>
+                <a:cs typeface="Consolas"/>
+              </a:defRPr>
+            </a:pPr>
+            <a:r>
+              <a:rPr sz="1125">
+                <a:solidFill>
+                  <a:srgbClr val="E5E7EB"/>
+                </a:solidFill>
+                <a:latin typeface="Consolas"/>
+                <a:ea typeface="Consolas"/>
+                <a:cs typeface="Consolas"/>
+              </a:rPr>
+              <a:t xml:space="preserve">    branches:</a:t>
+            </a:r>
+          </a:p>
+          <a:p>
+            <a:pPr>
+              <a:defRPr sz="1125">
+                <a:solidFill>
+                  <a:srgbClr val="E5E7EB"/>
+                </a:solidFill>
+                <a:latin typeface="Consolas"/>
+                <a:ea typeface="Consolas"/>
+                <a:cs typeface="Consolas"/>
+              </a:defRPr>
+            </a:pPr>
+            <a:r>
+              <a:rPr sz="1125">
+                <a:solidFill>
+                  <a:srgbClr val="E5E7EB"/>
+                </a:solidFill>
+                <a:latin typeface="Consolas"/>
+                <a:ea typeface="Consolas"/>
+                <a:cs typeface="Consolas"/>
+              </a:rPr>
+              <a:t xml:space="preserve">      - main</a:t>
+            </a:r>
+          </a:p>
+          <a:p>
             <a:pPr>
               <a:defRPr sz="1125">
                 <a:solidFill>
@@ -36215,30 +36353,53 @@
               <a:t xml:space="preserve">  pull_request:</a:t>
             </a:r>
           </a:p>
-          <a:p xmlns:a="http://schemas.openxmlformats.org/drawingml/2006/main">
-            <a:pPr>
-              <a:defRPr sz="1125">
-                <a:solidFill>
-                  <a:srgbClr val="E5E7EB"/>
-                </a:solidFill>
-                <a:latin typeface="Consolas"/>
-                <a:ea typeface="Consolas"/>
-                <a:cs typeface="Consolas"/>
-              </a:defRPr>
-            </a:pPr>
-            <a:r>
-              <a:rPr sz="1125">
-                <a:solidFill>
-                  <a:srgbClr val="E5E7EB"/>
-                </a:solidFill>
-                <a:latin typeface="Consolas"/>
-                <a:ea typeface="Consolas"/>
-                <a:cs typeface="Consolas"/>
-              </a:rPr>
-              <a:t xml:space="preserve">    branches: [ main ]</a:t>
-            </a:r>
-          </a:p>
-          <a:p xmlns:a="http://schemas.openxmlformats.org/drawingml/2006/main">
+          <a:p>
+            <a:pPr>
+              <a:defRPr sz="1125">
+                <a:solidFill>
+                  <a:srgbClr val="E5E7EB"/>
+                </a:solidFill>
+                <a:latin typeface="Consolas"/>
+                <a:ea typeface="Consolas"/>
+                <a:cs typeface="Consolas"/>
+              </a:defRPr>
+            </a:pPr>
+            <a:r>
+              <a:rPr sz="1125">
+                <a:solidFill>
+                  <a:srgbClr val="E5E7EB"/>
+                </a:solidFill>
+                <a:latin typeface="Consolas"/>
+                <a:ea typeface="Consolas"/>
+                <a:cs typeface="Consolas"/>
+              </a:rPr>
+              <a:t xml:space="preserve">    branches:</a:t>
+            </a:r>
+          </a:p>
+          <a:p>
+            <a:pPr>
+              <a:defRPr sz="1125">
+                <a:solidFill>
+                  <a:srgbClr val="E5E7EB"/>
+                </a:solidFill>
+                <a:latin typeface="Consolas"/>
+                <a:ea typeface="Consolas"/>
+                <a:cs typeface="Consolas"/>
+              </a:defRPr>
+            </a:pPr>
+            <a:r>
+              <a:rPr sz="1125">
+                <a:solidFill>
+                  <a:srgbClr val="E5E7EB"/>
+                </a:solidFill>
+                <a:latin typeface="Consolas"/>
+                <a:ea typeface="Consolas"/>
+                <a:cs typeface="Consolas"/>
+              </a:rPr>
+              <a:t xml:space="preserve">      - main</a:t>
+            </a:r>
+          </a:p>
+          <a:p>
             <a:pPr>
               <a:defRPr sz="1125">
                 <a:solidFill>
@@ -36261,7 +36422,7 @@
               <a:t/>
             </a:r>
           </a:p>
-          <a:p xmlns:a="http://schemas.openxmlformats.org/drawingml/2006/main">
+          <a:p>
             <a:pPr>
               <a:defRPr sz="1125">
                 <a:solidFill>
@@ -36284,7 +36445,7 @@
               <a:t>permissions:</a:t>
             </a:r>
           </a:p>
-          <a:p xmlns:a="http://schemas.openxmlformats.org/drawingml/2006/main">
+          <a:p>
             <a:pPr>
               <a:defRPr sz="1125">
                 <a:solidFill>
@@ -36307,7 +36468,7 @@
               <a:t xml:space="preserve">  contents: read</a:t>
             </a:r>
           </a:p>
-          <a:p xmlns:a="http://schemas.openxmlformats.org/drawingml/2006/main">
+          <a:p>
             <a:pPr>
               <a:defRPr sz="1125">
                 <a:solidFill>
@@ -36330,7 +36491,7 @@
               <a:t/>
             </a:r>
           </a:p>
-          <a:p xmlns:a="http://schemas.openxmlformats.org/drawingml/2006/main">
+          <a:p>
             <a:pPr>
               <a:defRPr sz="1125">
                 <a:solidFill>
@@ -36353,7 +36514,7 @@
               <a:t>env:</a:t>
             </a:r>
           </a:p>
-          <a:p xmlns:a="http://schemas.openxmlformats.org/drawingml/2006/main">
+          <a:p>
             <a:pPr>
               <a:defRPr sz="1125">
                 <a:solidFill>
@@ -36376,7 +36537,7 @@
               <a:t xml:space="preserve">  BACKEND_IMAGE: todo-backend</a:t>
             </a:r>
           </a:p>
-          <a:p xmlns:a="http://schemas.openxmlformats.org/drawingml/2006/main">
+          <a:p>
             <a:pPr>
               <a:defRPr sz="1125">
                 <a:solidFill>
@@ -36399,7 +36560,7 @@
               <a:t xml:space="preserve">  FRONTEND_IMAGE: todo-frontend</a:t>
             </a:r>
           </a:p>
-          <a:p xmlns:a="http://schemas.openxmlformats.org/drawingml/2006/main">
+          <a:p>
             <a:pPr>
               <a:defRPr sz="1125">
                 <a:solidFill>
@@ -36422,7 +36583,7 @@
               <a:t/>
             </a:r>
           </a:p>
-          <a:p xmlns:a="http://schemas.openxmlformats.org/drawingml/2006/main">
+          <a:p>
             <a:pPr>
               <a:defRPr sz="1125">
                 <a:solidFill>
@@ -36445,7 +36606,7 @@
               <a:t>jobs:</a:t>
             </a:r>
           </a:p>
-          <a:p xmlns:a="http://schemas.openxmlformats.org/drawingml/2006/main">
+          <a:p>
             <a:pPr>
               <a:defRPr sz="1125">
                 <a:solidFill>
@@ -36468,7 +36629,7 @@
               <a:t xml:space="preserve">  test-backend:</a:t>
             </a:r>
           </a:p>
-          <a:p xmlns:a="http://schemas.openxmlformats.org/drawingml/2006/main">
+          <a:p>
             <a:pPr>
               <a:defRPr sz="1125">
                 <a:solidFill>
@@ -36491,7 +36652,7 @@
               <a:t xml:space="preserve">    runs-on: ubuntu-latest</a:t>
             </a:r>
           </a:p>
-          <a:p xmlns:a="http://schemas.openxmlformats.org/drawingml/2006/main">
+          <a:p>
             <a:pPr>
               <a:defRPr sz="1125">
                 <a:solidFill>
@@ -36514,7 +36675,7 @@
               <a:t/>
             </a:r>
           </a:p>
-          <a:p xmlns:a="http://schemas.openxmlformats.org/drawingml/2006/main">
+          <a:p>
             <a:pPr>
               <a:defRPr sz="1125">
                 <a:solidFill>
@@ -36537,7 +36698,7 @@
               <a:t xml:space="preserve">    defaults:</a:t>
             </a:r>
           </a:p>
-          <a:p xmlns:a="http://schemas.openxmlformats.org/drawingml/2006/main">
+          <a:p>
             <a:pPr>
               <a:defRPr sz="1125">
                 <a:solidFill>
@@ -36560,7 +36721,7 @@
               <a:t xml:space="preserve">      run:</a:t>
             </a:r>
           </a:p>
-          <a:p xmlns:a="http://schemas.openxmlformats.org/drawingml/2006/main">
+          <a:p>
             <a:pPr>
               <a:defRPr sz="1125">
                 <a:solidFill>
@@ -36588,35 +36749,35 @@
       <p:sp>
         <p:nvSpPr>
           <p:cNvPr id="6" name="Footer">
-            <a:extLst xmlns:a="http://schemas.openxmlformats.org/drawingml/2006/main">
-              <a:ext uri="{FF2B5EF4-FFF2-40B4-BE49-F238E27FC236}">
-                <a16:creationId xmlns:a16="http://schemas.microsoft.com/office/drawing/2014/main" id="{07E5D6DC-1325-438C-867F-738996D14A27}"/>
-              </a:ext>
-            </a:extLst>
-          </p:cNvPr>
-          <p:cNvSpPr>
-            <a:spLocks xmlns:a="http://schemas.openxmlformats.org/drawingml/2006/main" noGrp="1"/>
-          </p:cNvSpPr>
-          <p:nvPr/>
-        </p:nvSpPr>
-        <p:spPr>
-          <a:xfrm xmlns:a="http://schemas.openxmlformats.org/drawingml/2006/main">
+            <a:extLst>
+              <a:ext uri="{FF2B5EF4-FFF2-40B4-BE49-F238E27FC236}">
+                <ns2:creationId id="{07E5D6DC-1325-438C-867F-738996D14A27}"/>
+              </a:ext>
+            </a:extLst>
+          </p:cNvPr>
+          <p:cNvSpPr>
+            <a:spLocks noGrp="1"/>
+          </p:cNvSpPr>
+          <p:nvPr/>
+        </p:nvSpPr>
+        <p:spPr>
+          <a:xfrm>
             <a:off x="609600" y="6400800"/>
             <a:ext cx="6667500" cy="228600"/>
           </a:xfrm>
-          <a:prstGeom xmlns:a="http://schemas.openxmlformats.org/drawingml/2006/main" prst="rect">
+          <a:prstGeom prst="rect">
             <a:avLst/>
           </a:prstGeom>
-          <a:noFill xmlns:a="http://schemas.openxmlformats.org/drawingml/2006/main"/>
-          <a:ln xmlns:a="http://schemas.openxmlformats.org/drawingml/2006/main" w="0">
+          <a:noFill/>
+          <a:ln w="0">
             <a:noFill/>
             <a:prstDash val="solid"/>
           </a:ln>
         </p:spPr>
         <p:txBody>
-          <a:bodyPr xmlns:a="http://schemas.openxmlformats.org/drawingml/2006/main"/>
-          <a:lstStyle xmlns:a="http://schemas.openxmlformats.org/drawingml/2006/main"/>
-          <a:p xmlns:a="http://schemas.openxmlformats.org/drawingml/2006/main">
+          <a:bodyPr/>
+          <a:lstStyle/>
+          <a:p>
             <a:pPr>
               <a:defRPr sz="900">
                 <a:solidFill>
@@ -36644,35 +36805,35 @@
       <p:sp>
         <p:nvSpPr>
           <p:cNvPr id="7" name="Page">
-            <a:extLst xmlns:a="http://schemas.openxmlformats.org/drawingml/2006/main">
-              <a:ext uri="{FF2B5EF4-FFF2-40B4-BE49-F238E27FC236}">
-                <a16:creationId xmlns:a16="http://schemas.microsoft.com/office/drawing/2014/main" id="{0ABD30E2-E89D-4E47-B491-9D0B7369A687}"/>
-              </a:ext>
-            </a:extLst>
-          </p:cNvPr>
-          <p:cNvSpPr>
-            <a:spLocks xmlns:a="http://schemas.openxmlformats.org/drawingml/2006/main" noGrp="1"/>
-          </p:cNvSpPr>
-          <p:nvPr/>
-        </p:nvSpPr>
-        <p:spPr>
-          <a:xfrm xmlns:a="http://schemas.openxmlformats.org/drawingml/2006/main">
+            <a:extLst>
+              <a:ext uri="{FF2B5EF4-FFF2-40B4-BE49-F238E27FC236}">
+                <ns2:creationId id="{0ABD30E2-E89D-4E47-B491-9D0B7369A687}"/>
+              </a:ext>
+            </a:extLst>
+          </p:cNvPr>
+          <p:cNvSpPr>
+            <a:spLocks noGrp="1"/>
+          </p:cNvSpPr>
+          <p:nvPr/>
+        </p:nvSpPr>
+        <p:spPr>
+          <a:xfrm>
             <a:off x="10934700" y="6400800"/>
             <a:ext cx="762000" cy="228600"/>
           </a:xfrm>
-          <a:prstGeom xmlns:a="http://schemas.openxmlformats.org/drawingml/2006/main" prst="rect">
+          <a:prstGeom prst="rect">
             <a:avLst/>
           </a:prstGeom>
-          <a:noFill xmlns:a="http://schemas.openxmlformats.org/drawingml/2006/main"/>
-          <a:ln xmlns:a="http://schemas.openxmlformats.org/drawingml/2006/main" w="0">
+          <a:noFill/>
+          <a:ln w="0">
             <a:noFill/>
             <a:prstDash val="solid"/>
           </a:ln>
         </p:spPr>
         <p:txBody>
-          <a:bodyPr xmlns:a="http://schemas.openxmlformats.org/drawingml/2006/main"/>
-          <a:lstStyle xmlns:a="http://schemas.openxmlformats.org/drawingml/2006/main"/>
-          <a:p xmlns:a="http://schemas.openxmlformats.org/drawingml/2006/main">
+          <a:bodyPr/>
+          <a:lstStyle/>
+          <a:p>
             <a:pPr algn="r">
               <a:defRPr sz="900">
                 <a:solidFill>
@@ -36700,7 +36861,7 @@
     </p:spTree>
     <p:extLst>
       <p:ext uri="{BB962C8B-B14F-4D97-AF65-F5344CB8AC3E}">
-        <p14:creationId xmlns:p14="http://schemas.microsoft.com/office/powerpoint/2010/main" val="1983827639"/>
+        <ns3:creationId val="1983827639"/>
       </p:ext>
     </p:extLst>
   </p:cSld>
@@ -43740,11 +43901,11 @@
 </file>
 
 <file path=ppt/slides/slide9.xml><?xml version="1.0" encoding="utf-8"?>
-<p:sld xmlns:p="http://schemas.openxmlformats.org/presentationml/2006/main">
+<p:sld xmlns:a="http://schemas.openxmlformats.org/drawingml/2006/main" xmlns:ns2="http://schemas.microsoft.com/office/drawing/2014/main" xmlns:ns3="http://schemas.microsoft.com/office/powerpoint/2010/main" xmlns:p="http://schemas.openxmlformats.org/presentationml/2006/main">
   <p:cSld>
     <p:bg>
       <p:bgPr>
-        <a:solidFill xmlns:a="http://schemas.openxmlformats.org/drawingml/2006/main">
+        <a:solidFill>
           <a:srgbClr val="F6F8FB"/>
         </a:solidFill>
       </p:bgPr>
@@ -43756,40 +43917,40 @@
         <p:nvPr/>
       </p:nvGrpSpPr>
       <p:grpSpPr>
-        <a:xfrm xmlns:a="http://schemas.openxmlformats.org/drawingml/2006/main"/>
+        <a:xfrm/>
       </p:grpSpPr>
       <p:sp>
         <p:nvSpPr>
           <p:cNvPr id="1" name="">
-            <a:extLst xmlns:a="http://schemas.openxmlformats.org/drawingml/2006/main">
-              <a:ext uri="{FF2B5EF4-FFF2-40B4-BE49-F238E27FC236}">
-                <a16:creationId xmlns:a16="http://schemas.microsoft.com/office/drawing/2014/main" id="{6DA32B8F-3F3D-404B-8463-BD64FBF6900F}"/>
-              </a:ext>
-            </a:extLst>
-          </p:cNvPr>
-          <p:cNvSpPr>
-            <a:spLocks xmlns:a="http://schemas.openxmlformats.org/drawingml/2006/main" noGrp="1"/>
-          </p:cNvSpPr>
-          <p:nvPr/>
-        </p:nvSpPr>
-        <p:spPr>
-          <a:xfrm xmlns:a="http://schemas.openxmlformats.org/drawingml/2006/main">
+            <a:extLst>
+              <a:ext uri="{FF2B5EF4-FFF2-40B4-BE49-F238E27FC236}">
+                <ns2:creationId id="{6DA32B8F-3F3D-404B-8463-BD64FBF6900F}"/>
+              </a:ext>
+            </a:extLst>
+          </p:cNvPr>
+          <p:cNvSpPr>
+            <a:spLocks noGrp="1"/>
+          </p:cNvSpPr>
+          <p:nvPr/>
+        </p:nvSpPr>
+        <p:spPr>
+          <a:xfrm>
             <a:off x="685800" y="304800"/>
             <a:ext cx="4000500" cy="228600"/>
           </a:xfrm>
-          <a:prstGeom xmlns:a="http://schemas.openxmlformats.org/drawingml/2006/main" prst="rect">
+          <a:prstGeom prst="rect">
             <a:avLst/>
           </a:prstGeom>
-          <a:noFill xmlns:a="http://schemas.openxmlformats.org/drawingml/2006/main"/>
-          <a:ln xmlns:a="http://schemas.openxmlformats.org/drawingml/2006/main" w="0">
+          <a:noFill/>
+          <a:ln w="0">
             <a:noFill/>
             <a:prstDash val="solid"/>
           </a:ln>
         </p:spPr>
         <p:txBody>
-          <a:bodyPr xmlns:a="http://schemas.openxmlformats.org/drawingml/2006/main"/>
-          <a:lstStyle xmlns:a="http://schemas.openxmlformats.org/drawingml/2006/main"/>
-          <a:p xmlns:a="http://schemas.openxmlformats.org/drawingml/2006/main">
+          <a:bodyPr/>
+          <a:lstStyle/>
+          <a:p>
             <a:pPr algn="l">
               <a:buNone/>
               <a:defRPr sz="1050" b="1">
@@ -43812,35 +43973,35 @@
       <p:sp>
         <p:nvSpPr>
           <p:cNvPr id="2" name="">
-            <a:extLst xmlns:a="http://schemas.openxmlformats.org/drawingml/2006/main">
-              <a:ext uri="{FF2B5EF4-FFF2-40B4-BE49-F238E27FC236}">
-                <a16:creationId xmlns:a16="http://schemas.microsoft.com/office/drawing/2014/main" id="{12CC3E04-1D3F-484F-AB0A-64A77C7BC9B4}"/>
-              </a:ext>
-            </a:extLst>
-          </p:cNvPr>
-          <p:cNvSpPr>
-            <a:spLocks xmlns:a="http://schemas.openxmlformats.org/drawingml/2006/main" noGrp="1"/>
-          </p:cNvSpPr>
-          <p:nvPr/>
-        </p:nvSpPr>
-        <p:spPr>
-          <a:xfrm xmlns:a="http://schemas.openxmlformats.org/drawingml/2006/main">
+            <a:extLst>
+              <a:ext uri="{FF2B5EF4-FFF2-40B4-BE49-F238E27FC236}">
+                <ns2:creationId id="{12CC3E04-1D3F-484F-AB0A-64A77C7BC9B4}"/>
+              </a:ext>
+            </a:extLst>
+          </p:cNvPr>
+          <p:cNvSpPr>
+            <a:spLocks noGrp="1"/>
+          </p:cNvSpPr>
+          <p:nvPr/>
+        </p:nvSpPr>
+        <p:spPr>
+          <a:xfrm>
             <a:off x="685800" y="647700"/>
             <a:ext cx="9334500" cy="552450"/>
           </a:xfrm>
-          <a:prstGeom xmlns:a="http://schemas.openxmlformats.org/drawingml/2006/main" prst="rect">
+          <a:prstGeom prst="rect">
             <a:avLst/>
           </a:prstGeom>
-          <a:noFill xmlns:a="http://schemas.openxmlformats.org/drawingml/2006/main"/>
-          <a:ln xmlns:a="http://schemas.openxmlformats.org/drawingml/2006/main" w="0">
+          <a:noFill/>
+          <a:ln w="0">
             <a:noFill/>
             <a:prstDash val="solid"/>
           </a:ln>
         </p:spPr>
         <p:txBody>
-          <a:bodyPr xmlns:a="http://schemas.openxmlformats.org/drawingml/2006/main"/>
-          <a:lstStyle xmlns:a="http://schemas.openxmlformats.org/drawingml/2006/main"/>
-          <a:p xmlns:a="http://schemas.openxmlformats.org/drawingml/2006/main">
+          <a:bodyPr/>
+          <a:lstStyle/>
+          <a:p>
             <a:pPr algn="l">
               <a:buNone/>
               <a:defRPr sz="2775" b="1">
@@ -43863,31 +44024,31 @@
       <p:sp>
         <p:nvSpPr>
           <p:cNvPr id="3" name="">
-            <a:extLst xmlns:a="http://schemas.openxmlformats.org/drawingml/2006/main">
-              <a:ext uri="{FF2B5EF4-FFF2-40B4-BE49-F238E27FC236}">
-                <a16:creationId xmlns:a16="http://schemas.microsoft.com/office/drawing/2014/main" id="{DA7C2C54-DD90-4853-9D0E-F5C8C5A39EF6}"/>
-              </a:ext>
-            </a:extLst>
-          </p:cNvPr>
-          <p:cNvSpPr>
-            <a:spLocks xmlns:a="http://schemas.openxmlformats.org/drawingml/2006/main" noGrp="1"/>
-          </p:cNvSpPr>
-          <p:nvPr/>
-        </p:nvSpPr>
-        <p:spPr>
-          <a:xfrm xmlns:a="http://schemas.openxmlformats.org/drawingml/2006/main">
+            <a:extLst>
+              <a:ext uri="{FF2B5EF4-FFF2-40B4-BE49-F238E27FC236}">
+                <ns2:creationId id="{DA7C2C54-DD90-4853-9D0E-F5C8C5A39EF6}"/>
+              </a:ext>
+            </a:extLst>
+          </p:cNvPr>
+          <p:cNvSpPr>
+            <a:spLocks noGrp="1"/>
+          </p:cNvSpPr>
+          <p:nvPr/>
+        </p:nvSpPr>
+        <p:spPr>
+          <a:xfrm>
             <a:off x="952500" y="1371600"/>
             <a:ext cx="5619750" cy="4343400"/>
           </a:xfrm>
-          <a:prstGeom xmlns:a="http://schemas.openxmlformats.org/drawingml/2006/main" prst="roundRect">
+          <a:prstGeom prst="roundRect">
             <a:avLst>
               <a:gd name="adj" fmla="val 1754"/>
             </a:avLst>
           </a:prstGeom>
-          <a:solidFill xmlns:a="http://schemas.openxmlformats.org/drawingml/2006/main">
+          <a:solidFill>
             <a:srgbClr val="101828"/>
           </a:solidFill>
-          <a:ln xmlns:a="http://schemas.openxmlformats.org/drawingml/2006/main" w="9525">
+          <a:ln w="9525">
             <a:solidFill>
               <a:srgbClr val="263244"/>
             </a:solidFill>
@@ -43895,25 +44056,25 @@
           </a:ln>
         </p:spPr>
         <p:style>
-          <a:lnRef xmlns:a="http://schemas.openxmlformats.org/drawingml/2006/main" idx="0"/>
-          <a:fillRef xmlns:a="http://schemas.openxmlformats.org/drawingml/2006/main" idx="0"/>
-          <a:effectRef xmlns:a="http://schemas.openxmlformats.org/drawingml/2006/main" idx="4"/>
-          <a:fontRef xmlns:a="http://schemas.openxmlformats.org/drawingml/2006/main" idx="major"/>
+          <a:lnRef idx="0"/>
+          <a:fillRef idx="0"/>
+          <a:effectRef idx="4"/>
+          <a:fontRef idx="major"/>
         </p:style>
         <p:txBody>
-          <a:bodyPr xmlns:a="http://schemas.openxmlformats.org/drawingml/2006/main"/>
-          <a:lstStyle xmlns:a="http://schemas.openxmlformats.org/drawingml/2006/main"/>
-          <a:p xmlns:a="http://schemas.openxmlformats.org/drawingml/2006/main">
+          <a:bodyPr/>
+          <a:lstStyle/>
+          <a:p>
             <a:pPr algn="l">
               <a:buNone/>
-              <a:defRPr sz="1275">
+              <a:defRPr sz="1100">
                 <a:solidFill>
                   <a:srgbClr val="F8FAFC"/>
                 </a:solidFill>
               </a:defRPr>
             </a:pPr>
             <a:r>
-              <a:rPr sz="1275">
+              <a:rPr sz="1100">
                 <a:solidFill>
                   <a:srgbClr val="F8FAFC"/>
                 </a:solidFill>
@@ -43921,17 +44082,17 @@
               <a:t>services:</a:t>
             </a:r>
           </a:p>
-          <a:p xmlns:a="http://schemas.openxmlformats.org/drawingml/2006/main">
+          <a:p>
             <a:pPr algn="l">
               <a:buNone/>
-              <a:defRPr sz="1275">
+              <a:defRPr sz="1100">
                 <a:solidFill>
                   <a:srgbClr val="F8FAFC"/>
                 </a:solidFill>
               </a:defRPr>
             </a:pPr>
             <a:r>
-              <a:rPr sz="1275">
+              <a:rPr sz="1100">
                 <a:solidFill>
                   <a:srgbClr val="F8FAFC"/>
                 </a:solidFill>
@@ -43939,17 +44100,17 @@
               <a:t xml:space="preserve">  frontend:</a:t>
             </a:r>
           </a:p>
-          <a:p xmlns:a="http://schemas.openxmlformats.org/drawingml/2006/main">
+          <a:p>
             <a:pPr algn="l">
               <a:buNone/>
-              <a:defRPr sz="1275">
+              <a:defRPr sz="1100">
                 <a:solidFill>
                   <a:srgbClr val="F8FAFC"/>
                 </a:solidFill>
               </a:defRPr>
             </a:pPr>
             <a:r>
-              <a:rPr sz="1275">
+              <a:rPr sz="1100">
                 <a:solidFill>
                   <a:srgbClr val="F8FAFC"/>
                 </a:solidFill>
@@ -43957,17 +44118,17 @@
               <a:t xml:space="preserve">    image: todo-frontend:1.0.0</a:t>
             </a:r>
           </a:p>
-          <a:p xmlns:a="http://schemas.openxmlformats.org/drawingml/2006/main">
+          <a:p>
             <a:pPr algn="l">
               <a:buNone/>
-              <a:defRPr sz="1275">
+              <a:defRPr sz="1100">
                 <a:solidFill>
                   <a:srgbClr val="F8FAFC"/>
                 </a:solidFill>
               </a:defRPr>
             </a:pPr>
             <a:r>
-              <a:rPr sz="1275">
+              <a:rPr sz="1100">
                 <a:solidFill>
                   <a:srgbClr val="F8FAFC"/>
                 </a:solidFill>
@@ -43975,265 +44136,301 @@
               <a:t xml:space="preserve">    build: ./frontend</a:t>
             </a:r>
           </a:p>
-          <a:p xmlns:a="http://schemas.openxmlformats.org/drawingml/2006/main">
+          <a:p>
             <a:pPr algn="l">
               <a:buNone/>
-              <a:defRPr sz="1275">
+              <a:defRPr sz="1100">
                 <a:solidFill>
                   <a:srgbClr val="F8FAFC"/>
                 </a:solidFill>
               </a:defRPr>
             </a:pPr>
             <a:r>
-              <a:rPr sz="1275">
+              <a:rPr sz="1100">
                 <a:solidFill>
                   <a:srgbClr val="F8FAFC"/>
                 </a:solidFill>
               </a:rPr>
-              <a:t xml:space="preserve">    ports: ["8080:80"]</a:t>
-            </a:r>
-          </a:p>
-          <a:p xmlns:a="http://schemas.openxmlformats.org/drawingml/2006/main">
+              <a:t xml:space="preserve">    ports:</a:t>
+            </a:r>
+          </a:p>
+          <a:p>
             <a:pPr algn="l">
               <a:buNone/>
-              <a:defRPr sz="1275">
+              <a:defRPr sz="1100">
                 <a:solidFill>
                   <a:srgbClr val="F8FAFC"/>
                 </a:solidFill>
               </a:defRPr>
             </a:pPr>
             <a:r>
-              <a:rPr sz="1275">
+              <a:rPr sz="1100">
                 <a:solidFill>
                   <a:srgbClr val="F8FAFC"/>
                 </a:solidFill>
               </a:rPr>
-              <a:t xml:space="preserve">    depends_on: [backend]</a:t>
-            </a:r>
-          </a:p>
-          <a:p xmlns:a="http://schemas.openxmlformats.org/drawingml/2006/main">
-            <a:r>
-              <a:t/>
-            </a:r>
-          </a:p>
-          <a:p xmlns:a="http://schemas.openxmlformats.org/drawingml/2006/main">
+              <a:t xml:space="preserve">      - "8080:80"</a:t>
+            </a:r>
+          </a:p>
+          <a:p>
             <a:pPr algn="l">
               <a:buNone/>
-              <a:defRPr sz="1275">
+              <a:defRPr sz="1100">
                 <a:solidFill>
                   <a:srgbClr val="F8FAFC"/>
                 </a:solidFill>
               </a:defRPr>
             </a:pPr>
             <a:r>
-              <a:rPr sz="1275">
+              <a:rPr sz="1100">
                 <a:solidFill>
                   <a:srgbClr val="F8FAFC"/>
                 </a:solidFill>
               </a:rPr>
-              <a:t xml:space="preserve">  backend:</a:t>
-            </a:r>
-          </a:p>
-          <a:p xmlns:a="http://schemas.openxmlformats.org/drawingml/2006/main">
+              <a:t xml:space="preserve">    depends_on:</a:t>
+            </a:r>
+          </a:p>
+          <a:p>
             <a:pPr algn="l">
               <a:buNone/>
-              <a:defRPr sz="1275">
+              <a:defRPr sz="1100">
                 <a:solidFill>
                   <a:srgbClr val="F8FAFC"/>
                 </a:solidFill>
               </a:defRPr>
             </a:pPr>
             <a:r>
-              <a:rPr sz="1275">
+              <a:rPr sz="1100">
                 <a:solidFill>
                   <a:srgbClr val="F8FAFC"/>
                 </a:solidFill>
               </a:rPr>
-              <a:t xml:space="preserve">    image: todo-backend:1.0.0</a:t>
-            </a:r>
-          </a:p>
-          <a:p xmlns:a="http://schemas.openxmlformats.org/drawingml/2006/main">
+              <a:t xml:space="preserve">      - backend</a:t>
+            </a:r>
+          </a:p>
+          <a:p>
+            <a:r>
+              <a:t/>
+            </a:r>
+          </a:p>
+          <a:p>
             <a:pPr algn="l">
               <a:buNone/>
-              <a:defRPr sz="1275">
+              <a:defRPr sz="1100">
                 <a:solidFill>
                   <a:srgbClr val="F8FAFC"/>
                 </a:solidFill>
               </a:defRPr>
             </a:pPr>
             <a:r>
-              <a:rPr sz="1275">
+              <a:rPr sz="1100">
                 <a:solidFill>
                   <a:srgbClr val="F8FAFC"/>
                 </a:solidFill>
               </a:rPr>
-              <a:t xml:space="preserve">    build: ./backend</a:t>
-            </a:r>
-          </a:p>
-          <a:p xmlns:a="http://schemas.openxmlformats.org/drawingml/2006/main">
+              <a:t xml:space="preserve">  backend:</a:t>
+            </a:r>
+          </a:p>
+          <a:p>
             <a:pPr algn="l">
               <a:buNone/>
-              <a:defRPr sz="1275">
+              <a:defRPr sz="1100">
                 <a:solidFill>
                   <a:srgbClr val="F8FAFC"/>
                 </a:solidFill>
               </a:defRPr>
             </a:pPr>
             <a:r>
-              <a:rPr sz="1275">
+              <a:rPr sz="1100">
                 <a:solidFill>
                   <a:srgbClr val="F8FAFC"/>
                 </a:solidFill>
               </a:rPr>
-              <a:t xml:space="preserve">    environment:</a:t>
-            </a:r>
-          </a:p>
-          <a:p xmlns:a="http://schemas.openxmlformats.org/drawingml/2006/main">
+              <a:t xml:space="preserve">    image: todo-backend:1.0.0</a:t>
+            </a:r>
+          </a:p>
+          <a:p>
             <a:pPr algn="l">
               <a:buNone/>
-              <a:defRPr sz="1275">
+              <a:defRPr sz="1100">
                 <a:solidFill>
                   <a:srgbClr val="F8FAFC"/>
                 </a:solidFill>
               </a:defRPr>
             </a:pPr>
             <a:r>
-              <a:rPr sz="1275">
+              <a:rPr sz="1100">
                 <a:solidFill>
                   <a:srgbClr val="F8FAFC"/>
                 </a:solidFill>
               </a:rPr>
-              <a:t xml:space="preserve">      MYSQL_HOST: db</a:t>
-            </a:r>
-          </a:p>
-          <a:p xmlns:a="http://schemas.openxmlformats.org/drawingml/2006/main">
+              <a:t xml:space="preserve">    build: ./backend</a:t>
+            </a:r>
+          </a:p>
+          <a:p>
             <a:pPr algn="l">
               <a:buNone/>
-              <a:defRPr sz="1275">
+              <a:defRPr sz="1100">
                 <a:solidFill>
                   <a:srgbClr val="F8FAFC"/>
                 </a:solidFill>
               </a:defRPr>
             </a:pPr>
             <a:r>
-              <a:rPr sz="1275">
+              <a:rPr sz="1100">
                 <a:solidFill>
                   <a:srgbClr val="F8FAFC"/>
                 </a:solidFill>
               </a:rPr>
-              <a:t xml:space="preserve">    depends_on:</a:t>
-            </a:r>
-          </a:p>
-          <a:p xmlns:a="http://schemas.openxmlformats.org/drawingml/2006/main">
+              <a:t xml:space="preserve">    environment:</a:t>
+            </a:r>
+          </a:p>
+          <a:p>
             <a:pPr algn="l">
               <a:buNone/>
-              <a:defRPr sz="1275">
+              <a:defRPr sz="1100">
                 <a:solidFill>
                   <a:srgbClr val="F8FAFC"/>
                 </a:solidFill>
               </a:defRPr>
             </a:pPr>
             <a:r>
-              <a:rPr sz="1275">
+              <a:rPr sz="1100">
                 <a:solidFill>
                   <a:srgbClr val="F8FAFC"/>
                 </a:solidFill>
               </a:rPr>
-              <a:t xml:space="preserve">      db:</a:t>
-            </a:r>
-          </a:p>
-          <a:p xmlns:a="http://schemas.openxmlformats.org/drawingml/2006/main">
+              <a:t xml:space="preserve">      MYSQL_HOST: db</a:t>
+            </a:r>
+          </a:p>
+          <a:p>
             <a:pPr algn="l">
               <a:buNone/>
-              <a:defRPr sz="1275">
+              <a:defRPr sz="1100">
                 <a:solidFill>
                   <a:srgbClr val="F8FAFC"/>
                 </a:solidFill>
               </a:defRPr>
             </a:pPr>
             <a:r>
-              <a:rPr sz="1275">
+              <a:rPr sz="1100">
                 <a:solidFill>
                   <a:srgbClr val="F8FAFC"/>
                 </a:solidFill>
               </a:rPr>
-              <a:t xml:space="preserve">        condition: service_healthy</a:t>
-            </a:r>
-          </a:p>
-          <a:p xmlns:a="http://schemas.openxmlformats.org/drawingml/2006/main">
-            <a:r>
-              <a:t/>
-            </a:r>
-          </a:p>
-          <a:p xmlns:a="http://schemas.openxmlformats.org/drawingml/2006/main">
+              <a:t xml:space="preserve">    depends_on:</a:t>
+            </a:r>
+          </a:p>
+          <a:p>
             <a:pPr algn="l">
               <a:buNone/>
-              <a:defRPr sz="1275">
+              <a:defRPr sz="1100">
                 <a:solidFill>
                   <a:srgbClr val="F8FAFC"/>
                 </a:solidFill>
               </a:defRPr>
             </a:pPr>
             <a:r>
-              <a:rPr sz="1275">
+              <a:rPr sz="1100">
                 <a:solidFill>
                   <a:srgbClr val="F8FAFC"/>
                 </a:solidFill>
               </a:rPr>
-              <a:t xml:space="preserve">  db:</a:t>
-            </a:r>
-          </a:p>
-          <a:p xmlns:a="http://schemas.openxmlformats.org/drawingml/2006/main">
+              <a:t xml:space="preserve">      db:</a:t>
+            </a:r>
+          </a:p>
+          <a:p>
             <a:pPr algn="l">
               <a:buNone/>
-              <a:defRPr sz="1275">
+              <a:defRPr sz="1100">
                 <a:solidFill>
                   <a:srgbClr val="F8FAFC"/>
                 </a:solidFill>
               </a:defRPr>
             </a:pPr>
             <a:r>
-              <a:rPr sz="1275">
+              <a:rPr sz="1100">
                 <a:solidFill>
                   <a:srgbClr val="F8FAFC"/>
                 </a:solidFill>
               </a:rPr>
-              <a:t xml:space="preserve">    image: mysql:8.0</a:t>
-            </a:r>
-          </a:p>
-          <a:p xmlns:a="http://schemas.openxmlformats.org/drawingml/2006/main">
+              <a:t xml:space="preserve">        condition: service_healthy</a:t>
+            </a:r>
+          </a:p>
+          <a:p>
+            <a:r>
+              <a:t/>
+            </a:r>
+          </a:p>
+          <a:p>
             <a:pPr algn="l">
               <a:buNone/>
-              <a:defRPr sz="1275">
+              <a:defRPr sz="1100">
                 <a:solidFill>
                   <a:srgbClr val="F8FAFC"/>
                 </a:solidFill>
               </a:defRPr>
             </a:pPr>
             <a:r>
-              <a:rPr sz="1275">
+              <a:rPr sz="1100">
                 <a:solidFill>
                   <a:srgbClr val="F8FAFC"/>
                 </a:solidFill>
               </a:rPr>
-              <a:t xml:space="preserve">    volumes:</a:t>
-            </a:r>
-          </a:p>
-          <a:p xmlns:a="http://schemas.openxmlformats.org/drawingml/2006/main">
+              <a:t xml:space="preserve">  db:</a:t>
+            </a:r>
+          </a:p>
+          <a:p>
             <a:pPr algn="l">
               <a:buNone/>
-              <a:defRPr sz="1275">
+              <a:defRPr sz="1100">
                 <a:solidFill>
                   <a:srgbClr val="F8FAFC"/>
                 </a:solidFill>
               </a:defRPr>
             </a:pPr>
             <a:r>
-              <a:rPr sz="1275">
+              <a:rPr sz="1100">
                 <a:solidFill>
                   <a:srgbClr val="F8FAFC"/>
                 </a:solidFill>
               </a:rPr>
+              <a:t xml:space="preserve">    image: mysql:8.0</a:t>
+            </a:r>
+          </a:p>
+          <a:p>
+            <a:pPr algn="l">
+              <a:buNone/>
+              <a:defRPr sz="1100">
+                <a:solidFill>
+                  <a:srgbClr val="F8FAFC"/>
+                </a:solidFill>
+              </a:defRPr>
+            </a:pPr>
+            <a:r>
+              <a:rPr sz="1100">
+                <a:solidFill>
+                  <a:srgbClr val="F8FAFC"/>
+                </a:solidFill>
+              </a:rPr>
+              <a:t xml:space="preserve">    volumes:</a:t>
+            </a:r>
+          </a:p>
+          <a:p>
+            <a:pPr algn="l">
+              <a:buNone/>
+              <a:defRPr sz="1100">
+                <a:solidFill>
+                  <a:srgbClr val="F8FAFC"/>
+                </a:solidFill>
+              </a:defRPr>
+            </a:pPr>
+            <a:r>
+              <a:rPr sz="1100">
+                <a:solidFill>
+                  <a:srgbClr val="F8FAFC"/>
+                </a:solidFill>
+              </a:rPr>
               <a:t xml:space="preserve">      - todo-db-data:/var/lib/mysql</a:t>
             </a:r>
           </a:p>
@@ -44242,31 +44439,31 @@
       <p:sp>
         <p:nvSpPr>
           <p:cNvPr id="4" name="">
-            <a:extLst xmlns:a="http://schemas.openxmlformats.org/drawingml/2006/main">
-              <a:ext uri="{FF2B5EF4-FFF2-40B4-BE49-F238E27FC236}">
-                <a16:creationId xmlns:a16="http://schemas.microsoft.com/office/drawing/2014/main" id="{D86F0DEA-7FA3-4D2A-AC0D-98FA15141359}"/>
-              </a:ext>
-            </a:extLst>
-          </p:cNvPr>
-          <p:cNvSpPr>
-            <a:spLocks xmlns:a="http://schemas.openxmlformats.org/drawingml/2006/main" noGrp="1"/>
-          </p:cNvSpPr>
-          <p:nvPr/>
-        </p:nvSpPr>
-        <p:spPr>
-          <a:xfrm xmlns:a="http://schemas.openxmlformats.org/drawingml/2006/main">
+            <a:extLst>
+              <a:ext uri="{FF2B5EF4-FFF2-40B4-BE49-F238E27FC236}">
+                <ns2:creationId id="{D86F0DEA-7FA3-4D2A-AC0D-98FA15141359}"/>
+              </a:ext>
+            </a:extLst>
+          </p:cNvPr>
+          <p:cNvSpPr>
+            <a:spLocks noGrp="1"/>
+          </p:cNvSpPr>
+          <p:nvPr/>
+        </p:nvSpPr>
+        <p:spPr>
+          <a:xfrm>
             <a:off x="7143750" y="1657350"/>
             <a:ext cx="133350" cy="133350"/>
           </a:xfrm>
-          <a:prstGeom xmlns:a="http://schemas.openxmlformats.org/drawingml/2006/main" prst="roundRect">
+          <a:prstGeom prst="roundRect">
             <a:avLst>
               <a:gd name="adj" fmla="val 50000"/>
             </a:avLst>
           </a:prstGeom>
-          <a:solidFill xmlns:a="http://schemas.openxmlformats.org/drawingml/2006/main">
+          <a:solidFill>
             <a:srgbClr val="D97706"/>
           </a:solidFill>
-          <a:ln xmlns:a="http://schemas.openxmlformats.org/drawingml/2006/main" w="9525">
+          <a:ln w="9525">
             <a:solidFill>
               <a:srgbClr val="D97706"/>
             </a:solidFill>
@@ -44274,9 +44471,9 @@
           </a:ln>
         </p:spPr>
         <p:txBody>
-          <a:bodyPr xmlns:a="http://schemas.openxmlformats.org/drawingml/2006/main"/>
-          <a:lstStyle xmlns:a="http://schemas.openxmlformats.org/drawingml/2006/main"/>
-          <a:p xmlns:a="http://schemas.openxmlformats.org/drawingml/2006/main">
+          <a:bodyPr/>
+          <a:lstStyle/>
+          <a:p>
             <a:r>
               <a:t/>
             </a:r>
@@ -44286,35 +44483,35 @@
       <p:sp>
         <p:nvSpPr>
           <p:cNvPr id="5" name="">
-            <a:extLst xmlns:a="http://schemas.openxmlformats.org/drawingml/2006/main">
-              <a:ext uri="{FF2B5EF4-FFF2-40B4-BE49-F238E27FC236}">
-                <a16:creationId xmlns:a16="http://schemas.microsoft.com/office/drawing/2014/main" id="{ED435391-3A90-439A-A232-C33AD4FD61FC}"/>
-              </a:ext>
-            </a:extLst>
-          </p:cNvPr>
-          <p:cNvSpPr>
-            <a:spLocks xmlns:a="http://schemas.openxmlformats.org/drawingml/2006/main" noGrp="1"/>
-          </p:cNvSpPr>
-          <p:nvPr/>
-        </p:nvSpPr>
-        <p:spPr>
-          <a:xfrm xmlns:a="http://schemas.openxmlformats.org/drawingml/2006/main">
+            <a:extLst>
+              <a:ext uri="{FF2B5EF4-FFF2-40B4-BE49-F238E27FC236}">
+                <ns2:creationId id="{ED435391-3A90-439A-A232-C33AD4FD61FC}"/>
+              </a:ext>
+            </a:extLst>
+          </p:cNvPr>
+          <p:cNvSpPr>
+            <a:spLocks noGrp="1"/>
+          </p:cNvSpPr>
+          <p:nvPr/>
+        </p:nvSpPr>
+        <p:spPr>
+          <a:xfrm>
             <a:off x="7467600" y="1600200"/>
             <a:ext cx="3581400" cy="571500"/>
           </a:xfrm>
-          <a:prstGeom xmlns:a="http://schemas.openxmlformats.org/drawingml/2006/main" prst="rect">
+          <a:prstGeom prst="rect">
             <a:avLst/>
           </a:prstGeom>
-          <a:noFill xmlns:a="http://schemas.openxmlformats.org/drawingml/2006/main"/>
-          <a:ln xmlns:a="http://schemas.openxmlformats.org/drawingml/2006/main" w="0">
+          <a:noFill/>
+          <a:ln w="0">
             <a:noFill/>
             <a:prstDash val="solid"/>
           </a:ln>
         </p:spPr>
         <p:txBody>
-          <a:bodyPr xmlns:a="http://schemas.openxmlformats.org/drawingml/2006/main"/>
-          <a:lstStyle xmlns:a="http://schemas.openxmlformats.org/drawingml/2006/main"/>
-          <a:p xmlns:a="http://schemas.openxmlformats.org/drawingml/2006/main">
+          <a:bodyPr/>
+          <a:lstStyle/>
+          <a:p>
             <a:pPr algn="l">
               <a:buNone/>
               <a:defRPr sz="1725" b="0">
@@ -44337,31 +44534,31 @@
       <p:sp>
         <p:nvSpPr>
           <p:cNvPr id="6" name="">
-            <a:extLst xmlns:a="http://schemas.openxmlformats.org/drawingml/2006/main">
-              <a:ext uri="{FF2B5EF4-FFF2-40B4-BE49-F238E27FC236}">
-                <a16:creationId xmlns:a16="http://schemas.microsoft.com/office/drawing/2014/main" id="{BC885D9D-2AFF-4EE9-BB74-CDD069EDA747}"/>
-              </a:ext>
-            </a:extLst>
-          </p:cNvPr>
-          <p:cNvSpPr>
-            <a:spLocks xmlns:a="http://schemas.openxmlformats.org/drawingml/2006/main" noGrp="1"/>
-          </p:cNvSpPr>
-          <p:nvPr/>
-        </p:nvSpPr>
-        <p:spPr>
-          <a:xfrm xmlns:a="http://schemas.openxmlformats.org/drawingml/2006/main">
+            <a:extLst>
+              <a:ext uri="{FF2B5EF4-FFF2-40B4-BE49-F238E27FC236}">
+                <ns2:creationId id="{BC885D9D-2AFF-4EE9-BB74-CDD069EDA747}"/>
+              </a:ext>
+            </a:extLst>
+          </p:cNvPr>
+          <p:cNvSpPr>
+            <a:spLocks noGrp="1"/>
+          </p:cNvSpPr>
+          <p:nvPr/>
+        </p:nvSpPr>
+        <p:spPr>
+          <a:xfrm>
             <a:off x="7143750" y="2266950"/>
             <a:ext cx="133350" cy="133350"/>
           </a:xfrm>
-          <a:prstGeom xmlns:a="http://schemas.openxmlformats.org/drawingml/2006/main" prst="roundRect">
+          <a:prstGeom prst="roundRect">
             <a:avLst>
               <a:gd name="adj" fmla="val 50000"/>
             </a:avLst>
           </a:prstGeom>
-          <a:solidFill xmlns:a="http://schemas.openxmlformats.org/drawingml/2006/main">
+          <a:solidFill>
             <a:srgbClr val="D97706"/>
           </a:solidFill>
-          <a:ln xmlns:a="http://schemas.openxmlformats.org/drawingml/2006/main" w="9525">
+          <a:ln w="9525">
             <a:solidFill>
               <a:srgbClr val="D97706"/>
             </a:solidFill>
@@ -44369,9 +44566,9 @@
           </a:ln>
         </p:spPr>
         <p:txBody>
-          <a:bodyPr xmlns:a="http://schemas.openxmlformats.org/drawingml/2006/main"/>
-          <a:lstStyle xmlns:a="http://schemas.openxmlformats.org/drawingml/2006/main"/>
-          <a:p xmlns:a="http://schemas.openxmlformats.org/drawingml/2006/main">
+          <a:bodyPr/>
+          <a:lstStyle/>
+          <a:p>
             <a:r>
               <a:t/>
             </a:r>
@@ -44381,35 +44578,35 @@
       <p:sp>
         <p:nvSpPr>
           <p:cNvPr id="7" name="">
-            <a:extLst xmlns:a="http://schemas.openxmlformats.org/drawingml/2006/main">
-              <a:ext uri="{FF2B5EF4-FFF2-40B4-BE49-F238E27FC236}">
-                <a16:creationId xmlns:a16="http://schemas.microsoft.com/office/drawing/2014/main" id="{E446E96B-795B-4B7B-A183-A3F2E2990886}"/>
-              </a:ext>
-            </a:extLst>
-          </p:cNvPr>
-          <p:cNvSpPr>
-            <a:spLocks xmlns:a="http://schemas.openxmlformats.org/drawingml/2006/main" noGrp="1"/>
-          </p:cNvSpPr>
-          <p:nvPr/>
-        </p:nvSpPr>
-        <p:spPr>
-          <a:xfrm xmlns:a="http://schemas.openxmlformats.org/drawingml/2006/main">
+            <a:extLst>
+              <a:ext uri="{FF2B5EF4-FFF2-40B4-BE49-F238E27FC236}">
+                <ns2:creationId id="{E446E96B-795B-4B7B-A183-A3F2E2990886}"/>
+              </a:ext>
+            </a:extLst>
+          </p:cNvPr>
+          <p:cNvSpPr>
+            <a:spLocks noGrp="1"/>
+          </p:cNvSpPr>
+          <p:nvPr/>
+        </p:nvSpPr>
+        <p:spPr>
+          <a:xfrm>
             <a:off x="7467600" y="2209800"/>
             <a:ext cx="3581400" cy="571500"/>
           </a:xfrm>
-          <a:prstGeom xmlns:a="http://schemas.openxmlformats.org/drawingml/2006/main" prst="rect">
+          <a:prstGeom prst="rect">
             <a:avLst/>
           </a:prstGeom>
-          <a:noFill xmlns:a="http://schemas.openxmlformats.org/drawingml/2006/main"/>
-          <a:ln xmlns:a="http://schemas.openxmlformats.org/drawingml/2006/main" w="0">
+          <a:noFill/>
+          <a:ln w="0">
             <a:noFill/>
             <a:prstDash val="solid"/>
           </a:ln>
         </p:spPr>
         <p:txBody>
-          <a:bodyPr xmlns:a="http://schemas.openxmlformats.org/drawingml/2006/main"/>
-          <a:lstStyle xmlns:a="http://schemas.openxmlformats.org/drawingml/2006/main"/>
-          <a:p xmlns:a="http://schemas.openxmlformats.org/drawingml/2006/main">
+          <a:bodyPr/>
+          <a:lstStyle/>
+          <a:p>
             <a:pPr algn="l">
               <a:buNone/>
               <a:defRPr sz="1725" b="0">
@@ -44432,31 +44629,31 @@
       <p:sp>
         <p:nvSpPr>
           <p:cNvPr id="8" name="">
-            <a:extLst xmlns:a="http://schemas.openxmlformats.org/drawingml/2006/main">
-              <a:ext uri="{FF2B5EF4-FFF2-40B4-BE49-F238E27FC236}">
-                <a16:creationId xmlns:a16="http://schemas.microsoft.com/office/drawing/2014/main" id="{39B04BBF-F925-44DB-83E3-1C10D0CFE2C7}"/>
-              </a:ext>
-            </a:extLst>
-          </p:cNvPr>
-          <p:cNvSpPr>
-            <a:spLocks xmlns:a="http://schemas.openxmlformats.org/drawingml/2006/main" noGrp="1"/>
-          </p:cNvSpPr>
-          <p:nvPr/>
-        </p:nvSpPr>
-        <p:spPr>
-          <a:xfrm xmlns:a="http://schemas.openxmlformats.org/drawingml/2006/main">
+            <a:extLst>
+              <a:ext uri="{FF2B5EF4-FFF2-40B4-BE49-F238E27FC236}">
+                <ns2:creationId id="{39B04BBF-F925-44DB-83E3-1C10D0CFE2C7}"/>
+              </a:ext>
+            </a:extLst>
+          </p:cNvPr>
+          <p:cNvSpPr>
+            <a:spLocks noGrp="1"/>
+          </p:cNvSpPr>
+          <p:nvPr/>
+        </p:nvSpPr>
+        <p:spPr>
+          <a:xfrm>
             <a:off x="7143750" y="2876550"/>
             <a:ext cx="133350" cy="133350"/>
           </a:xfrm>
-          <a:prstGeom xmlns:a="http://schemas.openxmlformats.org/drawingml/2006/main" prst="roundRect">
+          <a:prstGeom prst="roundRect">
             <a:avLst>
               <a:gd name="adj" fmla="val 50000"/>
             </a:avLst>
           </a:prstGeom>
-          <a:solidFill xmlns:a="http://schemas.openxmlformats.org/drawingml/2006/main">
+          <a:solidFill>
             <a:srgbClr val="D97706"/>
           </a:solidFill>
-          <a:ln xmlns:a="http://schemas.openxmlformats.org/drawingml/2006/main" w="9525">
+          <a:ln w="9525">
             <a:solidFill>
               <a:srgbClr val="D97706"/>
             </a:solidFill>
@@ -44464,9 +44661,9 @@
           </a:ln>
         </p:spPr>
         <p:txBody>
-          <a:bodyPr xmlns:a="http://schemas.openxmlformats.org/drawingml/2006/main"/>
-          <a:lstStyle xmlns:a="http://schemas.openxmlformats.org/drawingml/2006/main"/>
-          <a:p xmlns:a="http://schemas.openxmlformats.org/drawingml/2006/main">
+          <a:bodyPr/>
+          <a:lstStyle/>
+          <a:p>
             <a:r>
               <a:t/>
             </a:r>
@@ -44476,35 +44673,35 @@
       <p:sp>
         <p:nvSpPr>
           <p:cNvPr id="9" name="">
-            <a:extLst xmlns:a="http://schemas.openxmlformats.org/drawingml/2006/main">
-              <a:ext uri="{FF2B5EF4-FFF2-40B4-BE49-F238E27FC236}">
-                <a16:creationId xmlns:a16="http://schemas.microsoft.com/office/drawing/2014/main" id="{8C79B1DB-4002-40EB-8324-4EED4F93CFC0}"/>
-              </a:ext>
-            </a:extLst>
-          </p:cNvPr>
-          <p:cNvSpPr>
-            <a:spLocks xmlns:a="http://schemas.openxmlformats.org/drawingml/2006/main" noGrp="1"/>
-          </p:cNvSpPr>
-          <p:nvPr/>
-        </p:nvSpPr>
-        <p:spPr>
-          <a:xfrm xmlns:a="http://schemas.openxmlformats.org/drawingml/2006/main">
+            <a:extLst>
+              <a:ext uri="{FF2B5EF4-FFF2-40B4-BE49-F238E27FC236}">
+                <ns2:creationId id="{8C79B1DB-4002-40EB-8324-4EED4F93CFC0}"/>
+              </a:ext>
+            </a:extLst>
+          </p:cNvPr>
+          <p:cNvSpPr>
+            <a:spLocks noGrp="1"/>
+          </p:cNvSpPr>
+          <p:nvPr/>
+        </p:nvSpPr>
+        <p:spPr>
+          <a:xfrm>
             <a:off x="7467600" y="2819400"/>
             <a:ext cx="3581400" cy="571500"/>
           </a:xfrm>
-          <a:prstGeom xmlns:a="http://schemas.openxmlformats.org/drawingml/2006/main" prst="rect">
+          <a:prstGeom prst="rect">
             <a:avLst/>
           </a:prstGeom>
-          <a:noFill xmlns:a="http://schemas.openxmlformats.org/drawingml/2006/main"/>
-          <a:ln xmlns:a="http://schemas.openxmlformats.org/drawingml/2006/main" w="0">
+          <a:noFill/>
+          <a:ln w="0">
             <a:noFill/>
             <a:prstDash val="solid"/>
           </a:ln>
         </p:spPr>
         <p:txBody>
-          <a:bodyPr xmlns:a="http://schemas.openxmlformats.org/drawingml/2006/main"/>
-          <a:lstStyle xmlns:a="http://schemas.openxmlformats.org/drawingml/2006/main"/>
-          <a:p xmlns:a="http://schemas.openxmlformats.org/drawingml/2006/main">
+          <a:bodyPr/>
+          <a:lstStyle/>
+          <a:p>
             <a:pPr algn="l">
               <a:buNone/>
               <a:defRPr sz="1725" b="0">
@@ -44527,31 +44724,31 @@
       <p:sp>
         <p:nvSpPr>
           <p:cNvPr id="10" name="">
-            <a:extLst xmlns:a="http://schemas.openxmlformats.org/drawingml/2006/main">
-              <a:ext uri="{FF2B5EF4-FFF2-40B4-BE49-F238E27FC236}">
-                <a16:creationId xmlns:a16="http://schemas.microsoft.com/office/drawing/2014/main" id="{F4357A1F-58ED-42B9-9B7C-18DC44CA0607}"/>
-              </a:ext>
-            </a:extLst>
-          </p:cNvPr>
-          <p:cNvSpPr>
-            <a:spLocks xmlns:a="http://schemas.openxmlformats.org/drawingml/2006/main" noGrp="1"/>
-          </p:cNvSpPr>
-          <p:nvPr/>
-        </p:nvSpPr>
-        <p:spPr>
-          <a:xfrm xmlns:a="http://schemas.openxmlformats.org/drawingml/2006/main">
+            <a:extLst>
+              <a:ext uri="{FF2B5EF4-FFF2-40B4-BE49-F238E27FC236}">
+                <ns2:creationId id="{F4357A1F-58ED-42B9-9B7C-18DC44CA0607}"/>
+              </a:ext>
+            </a:extLst>
+          </p:cNvPr>
+          <p:cNvSpPr>
+            <a:spLocks noGrp="1"/>
+          </p:cNvSpPr>
+          <p:nvPr/>
+        </p:nvSpPr>
+        <p:spPr>
+          <a:xfrm>
             <a:off x="7143750" y="3486150"/>
             <a:ext cx="133350" cy="133350"/>
           </a:xfrm>
-          <a:prstGeom xmlns:a="http://schemas.openxmlformats.org/drawingml/2006/main" prst="roundRect">
+          <a:prstGeom prst="roundRect">
             <a:avLst>
               <a:gd name="adj" fmla="val 50000"/>
             </a:avLst>
           </a:prstGeom>
-          <a:solidFill xmlns:a="http://schemas.openxmlformats.org/drawingml/2006/main">
+          <a:solidFill>
             <a:srgbClr val="D97706"/>
           </a:solidFill>
-          <a:ln xmlns:a="http://schemas.openxmlformats.org/drawingml/2006/main" w="9525">
+          <a:ln w="9525">
             <a:solidFill>
               <a:srgbClr val="D97706"/>
             </a:solidFill>
@@ -44559,9 +44756,9 @@
           </a:ln>
         </p:spPr>
         <p:txBody>
-          <a:bodyPr xmlns:a="http://schemas.openxmlformats.org/drawingml/2006/main"/>
-          <a:lstStyle xmlns:a="http://schemas.openxmlformats.org/drawingml/2006/main"/>
-          <a:p xmlns:a="http://schemas.openxmlformats.org/drawingml/2006/main">
+          <a:bodyPr/>
+          <a:lstStyle/>
+          <a:p>
             <a:r>
               <a:t/>
             </a:r>
@@ -44571,35 +44768,35 @@
       <p:sp>
         <p:nvSpPr>
           <p:cNvPr id="11" name="">
-            <a:extLst xmlns:a="http://schemas.openxmlformats.org/drawingml/2006/main">
-              <a:ext uri="{FF2B5EF4-FFF2-40B4-BE49-F238E27FC236}">
-                <a16:creationId xmlns:a16="http://schemas.microsoft.com/office/drawing/2014/main" id="{D3ADEEE2-9F10-4243-9D13-F9C91BC83EDA}"/>
-              </a:ext>
-            </a:extLst>
-          </p:cNvPr>
-          <p:cNvSpPr>
-            <a:spLocks xmlns:a="http://schemas.openxmlformats.org/drawingml/2006/main" noGrp="1"/>
-          </p:cNvSpPr>
-          <p:nvPr/>
-        </p:nvSpPr>
-        <p:spPr>
-          <a:xfrm xmlns:a="http://schemas.openxmlformats.org/drawingml/2006/main">
+            <a:extLst>
+              <a:ext uri="{FF2B5EF4-FFF2-40B4-BE49-F238E27FC236}">
+                <ns2:creationId id="{D3ADEEE2-9F10-4243-9D13-F9C91BC83EDA}"/>
+              </a:ext>
+            </a:extLst>
+          </p:cNvPr>
+          <p:cNvSpPr>
+            <a:spLocks noGrp="1"/>
+          </p:cNvSpPr>
+          <p:nvPr/>
+        </p:nvSpPr>
+        <p:spPr>
+          <a:xfrm>
             <a:off x="7467600" y="3429000"/>
             <a:ext cx="3581400" cy="571500"/>
           </a:xfrm>
-          <a:prstGeom xmlns:a="http://schemas.openxmlformats.org/drawingml/2006/main" prst="rect">
+          <a:prstGeom prst="rect">
             <a:avLst/>
           </a:prstGeom>
-          <a:noFill xmlns:a="http://schemas.openxmlformats.org/drawingml/2006/main"/>
-          <a:ln xmlns:a="http://schemas.openxmlformats.org/drawingml/2006/main" w="0">
+          <a:noFill/>
+          <a:ln w="0">
             <a:noFill/>
             <a:prstDash val="solid"/>
           </a:ln>
         </p:spPr>
         <p:txBody>
-          <a:bodyPr xmlns:a="http://schemas.openxmlformats.org/drawingml/2006/main"/>
-          <a:lstStyle xmlns:a="http://schemas.openxmlformats.org/drawingml/2006/main"/>
-          <a:p xmlns:a="http://schemas.openxmlformats.org/drawingml/2006/main">
+          <a:bodyPr/>
+          <a:lstStyle/>
+          <a:p>
             <a:pPr algn="l">
               <a:buNone/>
               <a:defRPr sz="1725" b="0">
@@ -44622,31 +44819,31 @@
       <p:sp>
         <p:nvSpPr>
           <p:cNvPr id="12" name="">
-            <a:extLst xmlns:a="http://schemas.openxmlformats.org/drawingml/2006/main">
-              <a:ext uri="{FF2B5EF4-FFF2-40B4-BE49-F238E27FC236}">
-                <a16:creationId xmlns:a16="http://schemas.microsoft.com/office/drawing/2014/main" id="{1B53F9F3-BAFC-43E2-A5EE-9229B4951016}"/>
-              </a:ext>
-            </a:extLst>
-          </p:cNvPr>
-          <p:cNvSpPr>
-            <a:spLocks xmlns:a="http://schemas.openxmlformats.org/drawingml/2006/main" noGrp="1"/>
-          </p:cNvSpPr>
-          <p:nvPr/>
-        </p:nvSpPr>
-        <p:spPr>
-          <a:xfrm xmlns:a="http://schemas.openxmlformats.org/drawingml/2006/main">
+            <a:extLst>
+              <a:ext uri="{FF2B5EF4-FFF2-40B4-BE49-F238E27FC236}">
+                <ns2:creationId id="{1B53F9F3-BAFC-43E2-A5EE-9229B4951016}"/>
+              </a:ext>
+            </a:extLst>
+          </p:cNvPr>
+          <p:cNvSpPr>
+            <a:spLocks noGrp="1"/>
+          </p:cNvSpPr>
+          <p:nvPr/>
+        </p:nvSpPr>
+        <p:spPr>
+          <a:xfrm>
             <a:off x="7143750" y="4095750"/>
             <a:ext cx="133350" cy="133350"/>
           </a:xfrm>
-          <a:prstGeom xmlns:a="http://schemas.openxmlformats.org/drawingml/2006/main" prst="roundRect">
+          <a:prstGeom prst="roundRect">
             <a:avLst>
               <a:gd name="adj" fmla="val 50000"/>
             </a:avLst>
           </a:prstGeom>
-          <a:solidFill xmlns:a="http://schemas.openxmlformats.org/drawingml/2006/main">
+          <a:solidFill>
             <a:srgbClr val="D97706"/>
           </a:solidFill>
-          <a:ln xmlns:a="http://schemas.openxmlformats.org/drawingml/2006/main" w="9525">
+          <a:ln w="9525">
             <a:solidFill>
               <a:srgbClr val="D97706"/>
             </a:solidFill>
@@ -44654,9 +44851,9 @@
           </a:ln>
         </p:spPr>
         <p:txBody>
-          <a:bodyPr xmlns:a="http://schemas.openxmlformats.org/drawingml/2006/main"/>
-          <a:lstStyle xmlns:a="http://schemas.openxmlformats.org/drawingml/2006/main"/>
-          <a:p xmlns:a="http://schemas.openxmlformats.org/drawingml/2006/main">
+          <a:bodyPr/>
+          <a:lstStyle/>
+          <a:p>
             <a:r>
               <a:t/>
             </a:r>
@@ -44666,35 +44863,35 @@
       <p:sp>
         <p:nvSpPr>
           <p:cNvPr id="13" name="">
-            <a:extLst xmlns:a="http://schemas.openxmlformats.org/drawingml/2006/main">
-              <a:ext uri="{FF2B5EF4-FFF2-40B4-BE49-F238E27FC236}">
-                <a16:creationId xmlns:a16="http://schemas.microsoft.com/office/drawing/2014/main" id="{AD096851-1B36-45C5-9D97-28CD2BBF0248}"/>
-              </a:ext>
-            </a:extLst>
-          </p:cNvPr>
-          <p:cNvSpPr>
-            <a:spLocks xmlns:a="http://schemas.openxmlformats.org/drawingml/2006/main" noGrp="1"/>
-          </p:cNvSpPr>
-          <p:nvPr/>
-        </p:nvSpPr>
-        <p:spPr>
-          <a:xfrm xmlns:a="http://schemas.openxmlformats.org/drawingml/2006/main">
+            <a:extLst>
+              <a:ext uri="{FF2B5EF4-FFF2-40B4-BE49-F238E27FC236}">
+                <ns2:creationId id="{AD096851-1B36-45C5-9D97-28CD2BBF0248}"/>
+              </a:ext>
+            </a:extLst>
+          </p:cNvPr>
+          <p:cNvSpPr>
+            <a:spLocks noGrp="1"/>
+          </p:cNvSpPr>
+          <p:nvPr/>
+        </p:nvSpPr>
+        <p:spPr>
+          <a:xfrm>
             <a:off x="7467600" y="4038600"/>
             <a:ext cx="3581400" cy="571500"/>
           </a:xfrm>
-          <a:prstGeom xmlns:a="http://schemas.openxmlformats.org/drawingml/2006/main" prst="rect">
+          <a:prstGeom prst="rect">
             <a:avLst/>
           </a:prstGeom>
-          <a:noFill xmlns:a="http://schemas.openxmlformats.org/drawingml/2006/main"/>
-          <a:ln xmlns:a="http://schemas.openxmlformats.org/drawingml/2006/main" w="0">
+          <a:noFill/>
+          <a:ln w="0">
             <a:noFill/>
             <a:prstDash val="solid"/>
           </a:ln>
         </p:spPr>
         <p:txBody>
-          <a:bodyPr xmlns:a="http://schemas.openxmlformats.org/drawingml/2006/main"/>
-          <a:lstStyle xmlns:a="http://schemas.openxmlformats.org/drawingml/2006/main"/>
-          <a:p xmlns:a="http://schemas.openxmlformats.org/drawingml/2006/main">
+          <a:bodyPr/>
+          <a:lstStyle/>
+          <a:p>
             <a:pPr algn="l">
               <a:buNone/>
               <a:defRPr sz="1725" b="0">
@@ -44717,35 +44914,35 @@
       <p:sp>
         <p:nvSpPr>
           <p:cNvPr id="14" name="">
-            <a:extLst xmlns:a="http://schemas.openxmlformats.org/drawingml/2006/main">
-              <a:ext uri="{FF2B5EF4-FFF2-40B4-BE49-F238E27FC236}">
-                <a16:creationId xmlns:a16="http://schemas.microsoft.com/office/drawing/2014/main" id="{151BC1C1-9B8B-4AC7-968F-A4971DB57D3B}"/>
-              </a:ext>
-            </a:extLst>
-          </p:cNvPr>
-          <p:cNvSpPr>
-            <a:spLocks xmlns:a="http://schemas.openxmlformats.org/drawingml/2006/main" noGrp="1"/>
-          </p:cNvSpPr>
-          <p:nvPr/>
-        </p:nvSpPr>
-        <p:spPr>
-          <a:xfrm xmlns:a="http://schemas.openxmlformats.org/drawingml/2006/main">
+            <a:extLst>
+              <a:ext uri="{FF2B5EF4-FFF2-40B4-BE49-F238E27FC236}">
+                <ns2:creationId id="{151BC1C1-9B8B-4AC7-968F-A4971DB57D3B}"/>
+              </a:ext>
+            </a:extLst>
+          </p:cNvPr>
+          <p:cNvSpPr>
+            <a:spLocks noGrp="1"/>
+          </p:cNvSpPr>
+          <p:nvPr/>
+        </p:nvSpPr>
+        <p:spPr>
+          <a:xfrm>
             <a:off x="685800" y="6438900"/>
             <a:ext cx="4000500" cy="228600"/>
           </a:xfrm>
-          <a:prstGeom xmlns:a="http://schemas.openxmlformats.org/drawingml/2006/main" prst="rect">
+          <a:prstGeom prst="rect">
             <a:avLst/>
           </a:prstGeom>
-          <a:noFill xmlns:a="http://schemas.openxmlformats.org/drawingml/2006/main"/>
-          <a:ln xmlns:a="http://schemas.openxmlformats.org/drawingml/2006/main" w="0">
+          <a:noFill/>
+          <a:ln w="0">
             <a:noFill/>
             <a:prstDash val="solid"/>
           </a:ln>
         </p:spPr>
         <p:txBody>
-          <a:bodyPr xmlns:a="http://schemas.openxmlformats.org/drawingml/2006/main"/>
-          <a:lstStyle xmlns:a="http://schemas.openxmlformats.org/drawingml/2006/main"/>
-          <a:p xmlns:a="http://schemas.openxmlformats.org/drawingml/2006/main">
+          <a:bodyPr/>
+          <a:lstStyle/>
+          <a:p>
             <a:pPr algn="l">
               <a:buNone/>
               <a:defRPr sz="900" b="0">
@@ -44768,7 +44965,7 @@
     </p:spTree>
     <p:extLst>
       <p:ext uri="{BB962C8B-B14F-4D97-AF65-F5344CB8AC3E}">
-        <p14:creationId xmlns:p14="http://schemas.microsoft.com/office/powerpoint/2010/main" val="467604799"/>
+        <ns3:creationId val="467604799"/>
       </p:ext>
     </p:extLst>
   </p:cSld>
